--- a/exports/pptx/lessons/middle-module-01-what-is-iks/day-04-upavedas.pptx
+++ b/exports/pptx/lessons/middle-module-01-what-is-iks/day-04-upavedas.pptx
@@ -17,9 +17,17 @@
     <p:sldId id="265" r:id="rId11"/>
     <p:sldId id="266" r:id="rId12"/>
     <p:sldId id="267" r:id="rId13"/>
+    <p:sldId id="268" r:id="rId14"/>
+    <p:sldId id="269" r:id="rId15"/>
+    <p:sldId id="270" r:id="rId16"/>
+    <p:sldId id="271" r:id="rId17"/>
+    <p:sldId id="272" r:id="rId18"/>
+    <p:sldId id="273" r:id="rId19"/>
+    <p:sldId id="274" r:id="rId20"/>
+    <p:sldId id="275" r:id="rId21"/>
   </p:sldIdLst>
   <p:notesMasterIdLst>
-    <p:notesMasterId r:id="rId14"/>
+    <p:notesMasterId r:id="rId22"/>
   </p:notesMasterIdLst>
   <p:sldSz cx="9144000" cy="5143500"/>
   <p:notesSz cx="5143500" cy="9144000"/>
@@ -819,6 +827,622 @@
 </p:notes>
 </file>
 
+<file path=ppt/notesSlides/notesSlide13.xml><?xml version="1.0" encoding="utf-8"?>
+<p:notes xmlns:a="http://schemas.openxmlformats.org/drawingml/2006/main" xmlns:r="http://schemas.openxmlformats.org/officeDocument/2006/relationships" xmlns:p="http://schemas.openxmlformats.org/presentationml/2006/main">
+  <p:cSld>
+    <p:spTree>
+      <p:nvGrpSpPr>
+        <p:cNvPr id="1" name=""/>
+        <p:cNvGrpSpPr/>
+        <p:nvPr/>
+      </p:nvGrpSpPr>
+      <p:grpSpPr>
+        <a:xfrm>
+          <a:off x="0" y="0"/>
+          <a:ext cx="0" cy="0"/>
+          <a:chOff x="0" y="0"/>
+          <a:chExt cx="0" cy="0"/>
+        </a:xfrm>
+      </p:grpSpPr>
+      <p:sp>
+        <p:nvSpPr>
+          <p:cNvPr id="2" name="Slide Image Placeholder 1"/>
+          <p:cNvSpPr>
+            <a:spLocks noGrp="1" noRot="1" noChangeAspect="1"/>
+          </p:cNvSpPr>
+          <p:nvPr>
+            <p:ph type="sldImg"/>
+          </p:nvPr>
+        </p:nvSpPr>
+        <p:spPr/>
+      </p:sp>
+      <p:sp>
+        <p:nvSpPr>
+          <p:cNvPr id="3" name="Notes Placeholder 2"/>
+          <p:cNvSpPr>
+            <a:spLocks noGrp="1"/>
+          </p:cNvSpPr>
+          <p:nvPr>
+            <p:ph type="body" idx="1"/>
+          </p:nvPr>
+        </p:nvSpPr>
+        <p:spPr/>
+        <p:txBody>
+          <a:bodyPr/>
+          <a:lstStyle/>
+          <a:p>
+            <a:r>
+              <a:rPr lang="en-US" dirty="0"/>
+              <a:t/>
+            </a:r>
+            <a:endParaRPr lang="en-US" dirty="0"/>
+          </a:p>
+        </p:txBody>
+      </p:sp>
+      <p:sp>
+        <p:nvSpPr>
+          <p:cNvPr id="4" name="Slide Number Placeholder 3"/>
+          <p:cNvSpPr>
+            <a:spLocks noGrp="1"/>
+          </p:cNvSpPr>
+          <p:nvPr>
+            <p:ph type="sldNum" sz="quarter" idx="10"/>
+          </p:nvPr>
+        </p:nvSpPr>
+        <p:spPr/>
+        <p:txBody>
+          <a:bodyPr/>
+          <a:lstStyle/>
+          <a:p>
+            <a:fld id="{F7021451-1387-4CA6-816F-3879F97B5CBC}" type="slidenum">
+              <a:rPr lang="en-US"/>
+              <a:t>13</a:t>
+            </a:fld>
+            <a:endParaRPr lang="en-US"/>
+          </a:p>
+        </p:txBody>
+      </p:sp>
+    </p:spTree>
+    <p:extLst>
+      <p:ext uri="{BB962C8B-B14F-4D97-AF65-F5344CB8AC3E}">
+        <p14:creationId xmlns:p14="http://schemas.microsoft.com/office/powerpoint/2010/main" val="1024086991"/>
+      </p:ext>
+    </p:extLst>
+  </p:cSld>
+  <p:clrMapOvr>
+    <a:masterClrMapping/>
+  </p:clrMapOvr>
+</p:notes>
+</file>
+
+<file path=ppt/notesSlides/notesSlide14.xml><?xml version="1.0" encoding="utf-8"?>
+<p:notes xmlns:a="http://schemas.openxmlformats.org/drawingml/2006/main" xmlns:r="http://schemas.openxmlformats.org/officeDocument/2006/relationships" xmlns:p="http://schemas.openxmlformats.org/presentationml/2006/main">
+  <p:cSld>
+    <p:spTree>
+      <p:nvGrpSpPr>
+        <p:cNvPr id="1" name=""/>
+        <p:cNvGrpSpPr/>
+        <p:nvPr/>
+      </p:nvGrpSpPr>
+      <p:grpSpPr>
+        <a:xfrm>
+          <a:off x="0" y="0"/>
+          <a:ext cx="0" cy="0"/>
+          <a:chOff x="0" y="0"/>
+          <a:chExt cx="0" cy="0"/>
+        </a:xfrm>
+      </p:grpSpPr>
+      <p:sp>
+        <p:nvSpPr>
+          <p:cNvPr id="2" name="Slide Image Placeholder 1"/>
+          <p:cNvSpPr>
+            <a:spLocks noGrp="1" noRot="1" noChangeAspect="1"/>
+          </p:cNvSpPr>
+          <p:nvPr>
+            <p:ph type="sldImg"/>
+          </p:nvPr>
+        </p:nvSpPr>
+        <p:spPr/>
+      </p:sp>
+      <p:sp>
+        <p:nvSpPr>
+          <p:cNvPr id="3" name="Notes Placeholder 2"/>
+          <p:cNvSpPr>
+            <a:spLocks noGrp="1"/>
+          </p:cNvSpPr>
+          <p:nvPr>
+            <p:ph type="body" idx="1"/>
+          </p:nvPr>
+        </p:nvSpPr>
+        <p:spPr/>
+        <p:txBody>
+          <a:bodyPr/>
+          <a:lstStyle/>
+          <a:p>
+            <a:r>
+              <a:rPr lang="en-US" dirty="0"/>
+              <a:t/>
+            </a:r>
+            <a:endParaRPr lang="en-US" dirty="0"/>
+          </a:p>
+        </p:txBody>
+      </p:sp>
+      <p:sp>
+        <p:nvSpPr>
+          <p:cNvPr id="4" name="Slide Number Placeholder 3"/>
+          <p:cNvSpPr>
+            <a:spLocks noGrp="1"/>
+          </p:cNvSpPr>
+          <p:nvPr>
+            <p:ph type="sldNum" sz="quarter" idx="10"/>
+          </p:nvPr>
+        </p:nvSpPr>
+        <p:spPr/>
+        <p:txBody>
+          <a:bodyPr/>
+          <a:lstStyle/>
+          <a:p>
+            <a:fld id="{F7021451-1387-4CA6-816F-3879F97B5CBC}" type="slidenum">
+              <a:rPr lang="en-US"/>
+              <a:t>14</a:t>
+            </a:fld>
+            <a:endParaRPr lang="en-US"/>
+          </a:p>
+        </p:txBody>
+      </p:sp>
+    </p:spTree>
+    <p:extLst>
+      <p:ext uri="{BB962C8B-B14F-4D97-AF65-F5344CB8AC3E}">
+        <p14:creationId xmlns:p14="http://schemas.microsoft.com/office/powerpoint/2010/main" val="1024086991"/>
+      </p:ext>
+    </p:extLst>
+  </p:cSld>
+  <p:clrMapOvr>
+    <a:masterClrMapping/>
+  </p:clrMapOvr>
+</p:notes>
+</file>
+
+<file path=ppt/notesSlides/notesSlide15.xml><?xml version="1.0" encoding="utf-8"?>
+<p:notes xmlns:a="http://schemas.openxmlformats.org/drawingml/2006/main" xmlns:r="http://schemas.openxmlformats.org/officeDocument/2006/relationships" xmlns:p="http://schemas.openxmlformats.org/presentationml/2006/main">
+  <p:cSld>
+    <p:spTree>
+      <p:nvGrpSpPr>
+        <p:cNvPr id="1" name=""/>
+        <p:cNvGrpSpPr/>
+        <p:nvPr/>
+      </p:nvGrpSpPr>
+      <p:grpSpPr>
+        <a:xfrm>
+          <a:off x="0" y="0"/>
+          <a:ext cx="0" cy="0"/>
+          <a:chOff x="0" y="0"/>
+          <a:chExt cx="0" cy="0"/>
+        </a:xfrm>
+      </p:grpSpPr>
+      <p:sp>
+        <p:nvSpPr>
+          <p:cNvPr id="2" name="Slide Image Placeholder 1"/>
+          <p:cNvSpPr>
+            <a:spLocks noGrp="1" noRot="1" noChangeAspect="1"/>
+          </p:cNvSpPr>
+          <p:nvPr>
+            <p:ph type="sldImg"/>
+          </p:nvPr>
+        </p:nvSpPr>
+        <p:spPr/>
+      </p:sp>
+      <p:sp>
+        <p:nvSpPr>
+          <p:cNvPr id="3" name="Notes Placeholder 2"/>
+          <p:cNvSpPr>
+            <a:spLocks noGrp="1"/>
+          </p:cNvSpPr>
+          <p:nvPr>
+            <p:ph type="body" idx="1"/>
+          </p:nvPr>
+        </p:nvSpPr>
+        <p:spPr/>
+        <p:txBody>
+          <a:bodyPr/>
+          <a:lstStyle/>
+          <a:p>
+            <a:r>
+              <a:rPr lang="en-US" dirty="0"/>
+              <a:t/>
+            </a:r>
+            <a:endParaRPr lang="en-US" dirty="0"/>
+          </a:p>
+        </p:txBody>
+      </p:sp>
+      <p:sp>
+        <p:nvSpPr>
+          <p:cNvPr id="4" name="Slide Number Placeholder 3"/>
+          <p:cNvSpPr>
+            <a:spLocks noGrp="1"/>
+          </p:cNvSpPr>
+          <p:nvPr>
+            <p:ph type="sldNum" sz="quarter" idx="10"/>
+          </p:nvPr>
+        </p:nvSpPr>
+        <p:spPr/>
+        <p:txBody>
+          <a:bodyPr/>
+          <a:lstStyle/>
+          <a:p>
+            <a:fld id="{F7021451-1387-4CA6-816F-3879F97B5CBC}" type="slidenum">
+              <a:rPr lang="en-US"/>
+              <a:t>15</a:t>
+            </a:fld>
+            <a:endParaRPr lang="en-US"/>
+          </a:p>
+        </p:txBody>
+      </p:sp>
+    </p:spTree>
+    <p:extLst>
+      <p:ext uri="{BB962C8B-B14F-4D97-AF65-F5344CB8AC3E}">
+        <p14:creationId xmlns:p14="http://schemas.microsoft.com/office/powerpoint/2010/main" val="1024086991"/>
+      </p:ext>
+    </p:extLst>
+  </p:cSld>
+  <p:clrMapOvr>
+    <a:masterClrMapping/>
+  </p:clrMapOvr>
+</p:notes>
+</file>
+
+<file path=ppt/notesSlides/notesSlide16.xml><?xml version="1.0" encoding="utf-8"?>
+<p:notes xmlns:a="http://schemas.openxmlformats.org/drawingml/2006/main" xmlns:r="http://schemas.openxmlformats.org/officeDocument/2006/relationships" xmlns:p="http://schemas.openxmlformats.org/presentationml/2006/main">
+  <p:cSld>
+    <p:spTree>
+      <p:nvGrpSpPr>
+        <p:cNvPr id="1" name=""/>
+        <p:cNvGrpSpPr/>
+        <p:nvPr/>
+      </p:nvGrpSpPr>
+      <p:grpSpPr>
+        <a:xfrm>
+          <a:off x="0" y="0"/>
+          <a:ext cx="0" cy="0"/>
+          <a:chOff x="0" y="0"/>
+          <a:chExt cx="0" cy="0"/>
+        </a:xfrm>
+      </p:grpSpPr>
+      <p:sp>
+        <p:nvSpPr>
+          <p:cNvPr id="2" name="Slide Image Placeholder 1"/>
+          <p:cNvSpPr>
+            <a:spLocks noGrp="1" noRot="1" noChangeAspect="1"/>
+          </p:cNvSpPr>
+          <p:nvPr>
+            <p:ph type="sldImg"/>
+          </p:nvPr>
+        </p:nvSpPr>
+        <p:spPr/>
+      </p:sp>
+      <p:sp>
+        <p:nvSpPr>
+          <p:cNvPr id="3" name="Notes Placeholder 2"/>
+          <p:cNvSpPr>
+            <a:spLocks noGrp="1"/>
+          </p:cNvSpPr>
+          <p:nvPr>
+            <p:ph type="body" idx="1"/>
+          </p:nvPr>
+        </p:nvSpPr>
+        <p:spPr/>
+        <p:txBody>
+          <a:bodyPr/>
+          <a:lstStyle/>
+          <a:p>
+            <a:r>
+              <a:rPr lang="en-US" dirty="0"/>
+              <a:t/>
+            </a:r>
+            <a:endParaRPr lang="en-US" dirty="0"/>
+          </a:p>
+        </p:txBody>
+      </p:sp>
+      <p:sp>
+        <p:nvSpPr>
+          <p:cNvPr id="4" name="Slide Number Placeholder 3"/>
+          <p:cNvSpPr>
+            <a:spLocks noGrp="1"/>
+          </p:cNvSpPr>
+          <p:nvPr>
+            <p:ph type="sldNum" sz="quarter" idx="10"/>
+          </p:nvPr>
+        </p:nvSpPr>
+        <p:spPr/>
+        <p:txBody>
+          <a:bodyPr/>
+          <a:lstStyle/>
+          <a:p>
+            <a:fld id="{F7021451-1387-4CA6-816F-3879F97B5CBC}" type="slidenum">
+              <a:rPr lang="en-US"/>
+              <a:t>16</a:t>
+            </a:fld>
+            <a:endParaRPr lang="en-US"/>
+          </a:p>
+        </p:txBody>
+      </p:sp>
+    </p:spTree>
+    <p:extLst>
+      <p:ext uri="{BB962C8B-B14F-4D97-AF65-F5344CB8AC3E}">
+        <p14:creationId xmlns:p14="http://schemas.microsoft.com/office/powerpoint/2010/main" val="1024086991"/>
+      </p:ext>
+    </p:extLst>
+  </p:cSld>
+  <p:clrMapOvr>
+    <a:masterClrMapping/>
+  </p:clrMapOvr>
+</p:notes>
+</file>
+
+<file path=ppt/notesSlides/notesSlide17.xml><?xml version="1.0" encoding="utf-8"?>
+<p:notes xmlns:a="http://schemas.openxmlformats.org/drawingml/2006/main" xmlns:r="http://schemas.openxmlformats.org/officeDocument/2006/relationships" xmlns:p="http://schemas.openxmlformats.org/presentationml/2006/main">
+  <p:cSld>
+    <p:spTree>
+      <p:nvGrpSpPr>
+        <p:cNvPr id="1" name=""/>
+        <p:cNvGrpSpPr/>
+        <p:nvPr/>
+      </p:nvGrpSpPr>
+      <p:grpSpPr>
+        <a:xfrm>
+          <a:off x="0" y="0"/>
+          <a:ext cx="0" cy="0"/>
+          <a:chOff x="0" y="0"/>
+          <a:chExt cx="0" cy="0"/>
+        </a:xfrm>
+      </p:grpSpPr>
+      <p:sp>
+        <p:nvSpPr>
+          <p:cNvPr id="2" name="Slide Image Placeholder 1"/>
+          <p:cNvSpPr>
+            <a:spLocks noGrp="1" noRot="1" noChangeAspect="1"/>
+          </p:cNvSpPr>
+          <p:nvPr>
+            <p:ph type="sldImg"/>
+          </p:nvPr>
+        </p:nvSpPr>
+        <p:spPr/>
+      </p:sp>
+      <p:sp>
+        <p:nvSpPr>
+          <p:cNvPr id="3" name="Notes Placeholder 2"/>
+          <p:cNvSpPr>
+            <a:spLocks noGrp="1"/>
+          </p:cNvSpPr>
+          <p:nvPr>
+            <p:ph type="body" idx="1"/>
+          </p:nvPr>
+        </p:nvSpPr>
+        <p:spPr/>
+        <p:txBody>
+          <a:bodyPr/>
+          <a:lstStyle/>
+          <a:p>
+            <a:r>
+              <a:rPr lang="en-US" dirty="0"/>
+              <a:t/>
+            </a:r>
+            <a:endParaRPr lang="en-US" dirty="0"/>
+          </a:p>
+        </p:txBody>
+      </p:sp>
+      <p:sp>
+        <p:nvSpPr>
+          <p:cNvPr id="4" name="Slide Number Placeholder 3"/>
+          <p:cNvSpPr>
+            <a:spLocks noGrp="1"/>
+          </p:cNvSpPr>
+          <p:nvPr>
+            <p:ph type="sldNum" sz="quarter" idx="10"/>
+          </p:nvPr>
+        </p:nvSpPr>
+        <p:spPr/>
+        <p:txBody>
+          <a:bodyPr/>
+          <a:lstStyle/>
+          <a:p>
+            <a:fld id="{F7021451-1387-4CA6-816F-3879F97B5CBC}" type="slidenum">
+              <a:rPr lang="en-US"/>
+              <a:t>17</a:t>
+            </a:fld>
+            <a:endParaRPr lang="en-US"/>
+          </a:p>
+        </p:txBody>
+      </p:sp>
+    </p:spTree>
+    <p:extLst>
+      <p:ext uri="{BB962C8B-B14F-4D97-AF65-F5344CB8AC3E}">
+        <p14:creationId xmlns:p14="http://schemas.microsoft.com/office/powerpoint/2010/main" val="1024086991"/>
+      </p:ext>
+    </p:extLst>
+  </p:cSld>
+  <p:clrMapOvr>
+    <a:masterClrMapping/>
+  </p:clrMapOvr>
+</p:notes>
+</file>
+
+<file path=ppt/notesSlides/notesSlide18.xml><?xml version="1.0" encoding="utf-8"?>
+<p:notes xmlns:a="http://schemas.openxmlformats.org/drawingml/2006/main" xmlns:r="http://schemas.openxmlformats.org/officeDocument/2006/relationships" xmlns:p="http://schemas.openxmlformats.org/presentationml/2006/main">
+  <p:cSld>
+    <p:spTree>
+      <p:nvGrpSpPr>
+        <p:cNvPr id="1" name=""/>
+        <p:cNvGrpSpPr/>
+        <p:nvPr/>
+      </p:nvGrpSpPr>
+      <p:grpSpPr>
+        <a:xfrm>
+          <a:off x="0" y="0"/>
+          <a:ext cx="0" cy="0"/>
+          <a:chOff x="0" y="0"/>
+          <a:chExt cx="0" cy="0"/>
+        </a:xfrm>
+      </p:grpSpPr>
+      <p:sp>
+        <p:nvSpPr>
+          <p:cNvPr id="2" name="Slide Image Placeholder 1"/>
+          <p:cNvSpPr>
+            <a:spLocks noGrp="1" noRot="1" noChangeAspect="1"/>
+          </p:cNvSpPr>
+          <p:nvPr>
+            <p:ph type="sldImg"/>
+          </p:nvPr>
+        </p:nvSpPr>
+        <p:spPr/>
+      </p:sp>
+      <p:sp>
+        <p:nvSpPr>
+          <p:cNvPr id="3" name="Notes Placeholder 2"/>
+          <p:cNvSpPr>
+            <a:spLocks noGrp="1"/>
+          </p:cNvSpPr>
+          <p:nvPr>
+            <p:ph type="body" idx="1"/>
+          </p:nvPr>
+        </p:nvSpPr>
+        <p:spPr/>
+        <p:txBody>
+          <a:bodyPr/>
+          <a:lstStyle/>
+          <a:p>
+            <a:r>
+              <a:rPr lang="en-US" dirty="0"/>
+              <a:t/>
+            </a:r>
+            <a:endParaRPr lang="en-US" dirty="0"/>
+          </a:p>
+        </p:txBody>
+      </p:sp>
+      <p:sp>
+        <p:nvSpPr>
+          <p:cNvPr id="4" name="Slide Number Placeholder 3"/>
+          <p:cNvSpPr>
+            <a:spLocks noGrp="1"/>
+          </p:cNvSpPr>
+          <p:nvPr>
+            <p:ph type="sldNum" sz="quarter" idx="10"/>
+          </p:nvPr>
+        </p:nvSpPr>
+        <p:spPr/>
+        <p:txBody>
+          <a:bodyPr/>
+          <a:lstStyle/>
+          <a:p>
+            <a:fld id="{F7021451-1387-4CA6-816F-3879F97B5CBC}" type="slidenum">
+              <a:rPr lang="en-US"/>
+              <a:t>18</a:t>
+            </a:fld>
+            <a:endParaRPr lang="en-US"/>
+          </a:p>
+        </p:txBody>
+      </p:sp>
+    </p:spTree>
+    <p:extLst>
+      <p:ext uri="{BB962C8B-B14F-4D97-AF65-F5344CB8AC3E}">
+        <p14:creationId xmlns:p14="http://schemas.microsoft.com/office/powerpoint/2010/main" val="1024086991"/>
+      </p:ext>
+    </p:extLst>
+  </p:cSld>
+  <p:clrMapOvr>
+    <a:masterClrMapping/>
+  </p:clrMapOvr>
+</p:notes>
+</file>
+
+<file path=ppt/notesSlides/notesSlide19.xml><?xml version="1.0" encoding="utf-8"?>
+<p:notes xmlns:a="http://schemas.openxmlformats.org/drawingml/2006/main" xmlns:r="http://schemas.openxmlformats.org/officeDocument/2006/relationships" xmlns:p="http://schemas.openxmlformats.org/presentationml/2006/main">
+  <p:cSld>
+    <p:spTree>
+      <p:nvGrpSpPr>
+        <p:cNvPr id="1" name=""/>
+        <p:cNvGrpSpPr/>
+        <p:nvPr/>
+      </p:nvGrpSpPr>
+      <p:grpSpPr>
+        <a:xfrm>
+          <a:off x="0" y="0"/>
+          <a:ext cx="0" cy="0"/>
+          <a:chOff x="0" y="0"/>
+          <a:chExt cx="0" cy="0"/>
+        </a:xfrm>
+      </p:grpSpPr>
+      <p:sp>
+        <p:nvSpPr>
+          <p:cNvPr id="2" name="Slide Image Placeholder 1"/>
+          <p:cNvSpPr>
+            <a:spLocks noGrp="1" noRot="1" noChangeAspect="1"/>
+          </p:cNvSpPr>
+          <p:nvPr>
+            <p:ph type="sldImg"/>
+          </p:nvPr>
+        </p:nvSpPr>
+        <p:spPr/>
+      </p:sp>
+      <p:sp>
+        <p:nvSpPr>
+          <p:cNvPr id="3" name="Notes Placeholder 2"/>
+          <p:cNvSpPr>
+            <a:spLocks noGrp="1"/>
+          </p:cNvSpPr>
+          <p:nvPr>
+            <p:ph type="body" idx="1"/>
+          </p:nvPr>
+        </p:nvSpPr>
+        <p:spPr/>
+        <p:txBody>
+          <a:bodyPr/>
+          <a:lstStyle/>
+          <a:p>
+            <a:r>
+              <a:rPr lang="en-US" dirty="0"/>
+              <a:t/>
+            </a:r>
+            <a:endParaRPr lang="en-US" dirty="0"/>
+          </a:p>
+        </p:txBody>
+      </p:sp>
+      <p:sp>
+        <p:nvSpPr>
+          <p:cNvPr id="4" name="Slide Number Placeholder 3"/>
+          <p:cNvSpPr>
+            <a:spLocks noGrp="1"/>
+          </p:cNvSpPr>
+          <p:nvPr>
+            <p:ph type="sldNum" sz="quarter" idx="10"/>
+          </p:nvPr>
+        </p:nvSpPr>
+        <p:spPr/>
+        <p:txBody>
+          <a:bodyPr/>
+          <a:lstStyle/>
+          <a:p>
+            <a:fld id="{F7021451-1387-4CA6-816F-3879F97B5CBC}" type="slidenum">
+              <a:rPr lang="en-US"/>
+              <a:t>19</a:t>
+            </a:fld>
+            <a:endParaRPr lang="en-US"/>
+          </a:p>
+        </p:txBody>
+      </p:sp>
+    </p:spTree>
+    <p:extLst>
+      <p:ext uri="{BB962C8B-B14F-4D97-AF65-F5344CB8AC3E}">
+        <p14:creationId xmlns:p14="http://schemas.microsoft.com/office/powerpoint/2010/main" val="1024086991"/>
+      </p:ext>
+    </p:extLst>
+  </p:cSld>
+  <p:clrMapOvr>
+    <a:masterClrMapping/>
+  </p:clrMapOvr>
+</p:notes>
+</file>
+
 <file path=ppt/notesSlides/notesSlide2.xml><?xml version="1.0" encoding="utf-8"?>
 <p:notes xmlns:a="http://schemas.openxmlformats.org/drawingml/2006/main" xmlns:r="http://schemas.openxmlformats.org/officeDocument/2006/relationships" xmlns:p="http://schemas.openxmlformats.org/presentationml/2006/main">
   <p:cSld>
@@ -889,6 +1513,94 @@
             <a:fld id="{F7021451-1387-4CA6-816F-3879F97B5CBC}" type="slidenum">
               <a:rPr lang="en-US"/>
               <a:t>2</a:t>
+            </a:fld>
+            <a:endParaRPr lang="en-US"/>
+          </a:p>
+        </p:txBody>
+      </p:sp>
+    </p:spTree>
+    <p:extLst>
+      <p:ext uri="{BB962C8B-B14F-4D97-AF65-F5344CB8AC3E}">
+        <p14:creationId xmlns:p14="http://schemas.microsoft.com/office/powerpoint/2010/main" val="1024086991"/>
+      </p:ext>
+    </p:extLst>
+  </p:cSld>
+  <p:clrMapOvr>
+    <a:masterClrMapping/>
+  </p:clrMapOvr>
+</p:notes>
+</file>
+
+<file path=ppt/notesSlides/notesSlide20.xml><?xml version="1.0" encoding="utf-8"?>
+<p:notes xmlns:a="http://schemas.openxmlformats.org/drawingml/2006/main" xmlns:r="http://schemas.openxmlformats.org/officeDocument/2006/relationships" xmlns:p="http://schemas.openxmlformats.org/presentationml/2006/main">
+  <p:cSld>
+    <p:spTree>
+      <p:nvGrpSpPr>
+        <p:cNvPr id="1" name=""/>
+        <p:cNvGrpSpPr/>
+        <p:nvPr/>
+      </p:nvGrpSpPr>
+      <p:grpSpPr>
+        <a:xfrm>
+          <a:off x="0" y="0"/>
+          <a:ext cx="0" cy="0"/>
+          <a:chOff x="0" y="0"/>
+          <a:chExt cx="0" cy="0"/>
+        </a:xfrm>
+      </p:grpSpPr>
+      <p:sp>
+        <p:nvSpPr>
+          <p:cNvPr id="2" name="Slide Image Placeholder 1"/>
+          <p:cNvSpPr>
+            <a:spLocks noGrp="1" noRot="1" noChangeAspect="1"/>
+          </p:cNvSpPr>
+          <p:nvPr>
+            <p:ph type="sldImg"/>
+          </p:nvPr>
+        </p:nvSpPr>
+        <p:spPr/>
+      </p:sp>
+      <p:sp>
+        <p:nvSpPr>
+          <p:cNvPr id="3" name="Notes Placeholder 2"/>
+          <p:cNvSpPr>
+            <a:spLocks noGrp="1"/>
+          </p:cNvSpPr>
+          <p:nvPr>
+            <p:ph type="body" idx="1"/>
+          </p:nvPr>
+        </p:nvSpPr>
+        <p:spPr/>
+        <p:txBody>
+          <a:bodyPr/>
+          <a:lstStyle/>
+          <a:p>
+            <a:r>
+              <a:rPr lang="en-US" dirty="0"/>
+              <a:t/>
+            </a:r>
+            <a:endParaRPr lang="en-US" dirty="0"/>
+          </a:p>
+        </p:txBody>
+      </p:sp>
+      <p:sp>
+        <p:nvSpPr>
+          <p:cNvPr id="4" name="Slide Number Placeholder 3"/>
+          <p:cNvSpPr>
+            <a:spLocks noGrp="1"/>
+          </p:cNvSpPr>
+          <p:nvPr>
+            <p:ph type="sldNum" sz="quarter" idx="10"/>
+          </p:nvPr>
+        </p:nvSpPr>
+        <p:spPr/>
+        <p:txBody>
+          <a:bodyPr/>
+          <a:lstStyle/>
+          <a:p>
+            <a:fld id="{F7021451-1387-4CA6-816F-3879F97B5CBC}" type="slidenum">
+              <a:rPr lang="en-US"/>
+              <a:t>20</a:t>
             </a:fld>
             <a:endParaRPr lang="en-US"/>
           </a:p>
@@ -2054,102 +2766,6 @@
         </p:nvSpPr>
         <p:spPr>
           <a:xfrm>
-            <a:off x="406301" y="1223963"/>
-            <a:ext cx="8498026" cy="274290"/>
-          </a:xfrm>
-          <a:prstGeom prst="rect">
-            <a:avLst/>
-          </a:prstGeom>
-          <a:noFill/>
-          <a:ln/>
-        </p:spPr>
-        <p:txBody>
-          <a:bodyPr wrap="square" lIns="0" tIns="0" rIns="0" bIns="0" rtlCol="0" anchor="t"/>
-          <a:lstStyle/>
-          <a:p>
-            <a:pPr algn="l" indent="0" marL="0">
-              <a:lnSpc>
-                <a:spcPts val="2160"/>
-              </a:lnSpc>
-              <a:spcBef>
-                <a:spcPts val="600"/>
-              </a:spcBef>
-              <a:spcAft>
-                <a:spcPts val="800"/>
-              </a:spcAft>
-              <a:buNone/>
-            </a:pPr>
-            <a:r>
-              <a:rPr lang="en-US" sz="1800" b="1" dirty="0">
-                <a:solidFill>
-                  <a:srgbClr val="FE4447"/>
-                </a:solidFill>
-                <a:latin typeface="Georgia" pitchFamily="34" charset="0"/>
-                <a:ea typeface="Georgia" pitchFamily="34" charset="-122"/>
-                <a:cs typeface="Georgia" pitchFamily="34" charset="-120"/>
-              </a:rPr>
-              <a:t>Learning objective</a:t>
-            </a:r>
-            <a:endParaRPr lang="en-US" sz="1800" dirty="0"/>
-          </a:p>
-        </p:txBody>
-      </p:sp>
-      <p:sp>
-        <p:nvSpPr>
-          <p:cNvPr id="6" name="Text 4"/>
-          <p:cNvSpPr/>
-          <p:nvPr/>
-        </p:nvSpPr>
-        <p:spPr>
-          <a:xfrm>
-            <a:off x="406301" y="1637854"/>
-            <a:ext cx="8498026" cy="213271"/>
-          </a:xfrm>
-          <a:prstGeom prst="rect">
-            <a:avLst/>
-          </a:prstGeom>
-          <a:noFill/>
-          <a:ln/>
-        </p:spPr>
-        <p:txBody>
-          <a:bodyPr wrap="square" lIns="0" tIns="0" rIns="0" bIns="0" rtlCol="0" anchor="t"/>
-          <a:lstStyle/>
-          <a:p>
-            <a:pPr algn="l" indent="0" marL="0">
-              <a:lnSpc>
-                <a:spcPts val="1680"/>
-              </a:lnSpc>
-              <a:spcBef>
-                <a:spcPts val="300"/>
-              </a:spcBef>
-              <a:spcAft>
-                <a:spcPts val="300"/>
-              </a:spcAft>
-              <a:buNone/>
-            </a:pPr>
-            <a:r>
-              <a:rPr lang="en-US" sz="1200" dirty="0">
-                <a:solidFill>
-                  <a:srgbClr val="1C2833"/>
-                </a:solidFill>
-                <a:latin typeface="Arial" pitchFamily="34" charset="0"/>
-                <a:ea typeface="Arial" pitchFamily="34" charset="-122"/>
-                <a:cs typeface="Arial" pitchFamily="34" charset="-120"/>
-              </a:rPr>
-              <a:t>Students name the four Upavedas and one specific contribution of each.</a:t>
-            </a:r>
-            <a:endParaRPr lang="en-US" sz="1200" dirty="0"/>
-          </a:p>
-        </p:txBody>
-      </p:sp>
-      <p:sp>
-        <p:nvSpPr>
-          <p:cNvPr id="7" name="Text 5"/>
-          <p:cNvSpPr/>
-          <p:nvPr/>
-        </p:nvSpPr>
-        <p:spPr>
-          <a:xfrm>
             <a:off x="406301" y="4434929"/>
             <a:ext cx="8498026" cy="213271"/>
           </a:xfrm>
@@ -2294,7 +2910,7 @@
                 <a:ea typeface="Georgia" pitchFamily="34" charset="-122"/>
                 <a:cs typeface="Georgia" pitchFamily="34" charset="-120"/>
               </a:rPr>
-              <a:t>Differentiation</a:t>
+              <a:t>Core (20 min) (cont.)</a:t>
             </a:r>
             <a:endParaRPr lang="en-US" sz="1800" dirty="0"/>
           </a:p>
@@ -2308,8 +2924,8 @@
         </p:nvSpPr>
         <p:spPr>
           <a:xfrm>
-            <a:off x="634901" y="883593"/>
-            <a:ext cx="8102798" cy="525661"/>
+            <a:off x="406301" y="870942"/>
+            <a:ext cx="8498026" cy="426541"/>
           </a:xfrm>
           <a:prstGeom prst="rect">
             <a:avLst/>
@@ -2321,15 +2937,17 @@
           <a:bodyPr wrap="square" lIns="0" tIns="0" rIns="0" bIns="0" rtlCol="0" anchor="t"/>
           <a:lstStyle/>
           <a:p>
-            <a:pPr algn="l" marL="342900" indent="-342900">
-              <a:lnSpc>
-                <a:spcPts val="1620"/>
-              </a:lnSpc>
-              <a:spcAft>
-                <a:spcPts val="300"/>
-              </a:spcAft>
-              <a:buSzPct val="100000"/>
-              <a:buChar char="•"/>
+            <a:pPr algn="l" indent="0" marL="0">
+              <a:lnSpc>
+                <a:spcPts val="1680"/>
+              </a:lnSpc>
+              <a:spcBef>
+                <a:spcPts val="300"/>
+              </a:spcBef>
+              <a:spcAft>
+                <a:spcPts val="300"/>
+              </a:spcAft>
+              <a:buNone/>
             </a:pPr>
             <a:r>
               <a:rPr lang="en-US" sz="1200" b="1" dirty="0">
@@ -2340,12 +2958,15 @@
                 <a:ea typeface="Arial" pitchFamily="34" charset="-122"/>
                 <a:cs typeface="Arial" pitchFamily="34" charset="-120"/>
               </a:rPr>
-              <a:t>Tier up:</a:t>
-            </a:r>
-            <a:pPr algn="l" indent="0" marL="0">
-              <a:lnSpc>
-                <a:spcPts val="1620"/>
-              </a:lnSpc>
+              <a:t>Dhanurveda</a:t>
+            </a:r>
+            <a:pPr algn="l" indent="0" marL="0">
+              <a:lnSpc>
+                <a:spcPts val="1680"/>
+              </a:lnSpc>
+              <a:spcBef>
+                <a:spcPts val="300"/>
+              </a:spcBef>
               <a:spcAft>
                 <a:spcPts val="300"/>
               </a:spcAft>
@@ -2360,12 +2981,15 @@
                 <a:ea typeface="Arial" pitchFamily="34" charset="-122"/>
                 <a:cs typeface="Arial" pitchFamily="34" charset="-120"/>
               </a:rPr>
-              <a:t> Read the first chapter of the </a:t>
-            </a:r>
-            <a:pPr algn="l" indent="0" marL="0">
-              <a:lnSpc>
-                <a:spcPts val="1620"/>
-              </a:lnSpc>
+              <a:t> — From </a:t>
+            </a:r>
+            <a:pPr algn="l" indent="0" marL="0">
+              <a:lnSpc>
+                <a:spcPts val="1680"/>
+              </a:lnSpc>
+              <a:spcBef>
+                <a:spcPts val="300"/>
+              </a:spcBef>
               <a:spcAft>
                 <a:spcPts val="300"/>
               </a:spcAft>
@@ -2380,12 +3004,132 @@
                 <a:ea typeface="Arial" pitchFamily="34" charset="-122"/>
                 <a:cs typeface="Arial" pitchFamily="34" charset="-120"/>
               </a:rPr>
+              <a:t>dhanus</a:t>
+            </a:r>
+            <a:pPr algn="l" indent="0" marL="0">
+              <a:lnSpc>
+                <a:spcPts val="1680"/>
+              </a:lnSpc>
+              <a:spcBef>
+                <a:spcPts val="300"/>
+              </a:spcBef>
+              <a:spcAft>
+                <a:spcPts val="300"/>
+              </a:spcAft>
+              <a:buNone/>
+            </a:pPr>
+            <a:r>
+              <a:rPr lang="en-US" sz="1200" dirty="0">
+                <a:solidFill>
+                  <a:srgbClr val="1C2833"/>
+                </a:solidFill>
+                <a:latin typeface="Arial" pitchFamily="34" charset="0"/>
+                <a:ea typeface="Arial" pitchFamily="34" charset="-122"/>
+                <a:cs typeface="Arial" pitchFamily="34" charset="-120"/>
+              </a:rPr>
+              <a:t> (bow). Military training, weapon usage, fortification. Many texts lost; what survives is referenced in epics and later manuals.</a:t>
+            </a:r>
+            <a:endParaRPr lang="en-US" sz="1200" dirty="0"/>
+          </a:p>
+        </p:txBody>
+      </p:sp>
+      <p:sp>
+        <p:nvSpPr>
+          <p:cNvPr id="5" name="Text 3"/>
+          <p:cNvSpPr/>
+          <p:nvPr/>
+        </p:nvSpPr>
+        <p:spPr>
+          <a:xfrm>
+            <a:off x="406301" y="1373684"/>
+            <a:ext cx="8498026" cy="426541"/>
+          </a:xfrm>
+          <a:prstGeom prst="rect">
+            <a:avLst/>
+          </a:prstGeom>
+          <a:noFill/>
+          <a:ln/>
+        </p:spPr>
+        <p:txBody>
+          <a:bodyPr wrap="square" lIns="0" tIns="0" rIns="0" bIns="0" rtlCol="0" anchor="t"/>
+          <a:lstStyle/>
+          <a:p>
+            <a:pPr algn="l" indent="0" marL="0">
+              <a:lnSpc>
+                <a:spcPts val="1680"/>
+              </a:lnSpc>
+              <a:spcBef>
+                <a:spcPts val="300"/>
+              </a:spcBef>
+              <a:spcAft>
+                <a:spcPts val="300"/>
+              </a:spcAft>
+              <a:buNone/>
+            </a:pPr>
+            <a:r>
+              <a:rPr lang="en-US" sz="1200" b="1" dirty="0">
+                <a:solidFill>
+                  <a:srgbClr val="1C2833"/>
+                </a:solidFill>
+                <a:latin typeface="Arial" pitchFamily="34" charset="0"/>
+                <a:ea typeface="Arial" pitchFamily="34" charset="-122"/>
+                <a:cs typeface="Arial" pitchFamily="34" charset="-120"/>
+              </a:rPr>
+              <a:t>Gandharvaveda</a:t>
+            </a:r>
+            <a:pPr algn="l" indent="0" marL="0">
+              <a:lnSpc>
+                <a:spcPts val="1680"/>
+              </a:lnSpc>
+              <a:spcBef>
+                <a:spcPts val="300"/>
+              </a:spcBef>
+              <a:spcAft>
+                <a:spcPts val="300"/>
+              </a:spcAft>
+              <a:buNone/>
+            </a:pPr>
+            <a:r>
+              <a:rPr lang="en-US" sz="1200" dirty="0">
+                <a:solidFill>
+                  <a:srgbClr val="1C2833"/>
+                </a:solidFill>
+                <a:latin typeface="Arial" pitchFamily="34" charset="0"/>
+                <a:ea typeface="Arial" pitchFamily="34" charset="-122"/>
+                <a:cs typeface="Arial" pitchFamily="34" charset="-120"/>
+              </a:rPr>
+              <a:t> — Music and performing arts. Bharata's </a:t>
+            </a:r>
+            <a:pPr algn="l" indent="0" marL="0">
+              <a:lnSpc>
+                <a:spcPts val="1680"/>
+              </a:lnSpc>
+              <a:spcBef>
+                <a:spcPts val="300"/>
+              </a:spcBef>
+              <a:spcAft>
+                <a:spcPts val="300"/>
+              </a:spcAft>
+              <a:buNone/>
+            </a:pPr>
+            <a:r>
+              <a:rPr lang="en-US" sz="1200" i="1" dirty="0">
+                <a:solidFill>
+                  <a:srgbClr val="1C2833"/>
+                </a:solidFill>
+                <a:latin typeface="Arial" pitchFamily="34" charset="0"/>
+                <a:ea typeface="Arial" pitchFamily="34" charset="-122"/>
+                <a:cs typeface="Arial" pitchFamily="34" charset="-120"/>
+              </a:rPr>
               <a:t>Nāṭyaśāstra</a:t>
             </a:r>
             <a:pPr algn="l" indent="0" marL="0">
               <a:lnSpc>
-                <a:spcPts val="1620"/>
-              </a:lnSpc>
+                <a:spcPts val="1680"/>
+              </a:lnSpc>
+              <a:spcBef>
+                <a:spcPts val="300"/>
+              </a:spcBef>
               <a:spcAft>
                 <a:spcPts val="300"/>
               </a:spcAft>
@@ -2400,99 +3144,15 @@
                 <a:ea typeface="Arial" pitchFamily="34" charset="-122"/>
                 <a:cs typeface="Arial" pitchFamily="34" charset="-120"/>
               </a:rPr>
-              <a:t> in translation. What does it claim is the </a:t>
-            </a:r>
-            <a:pPr algn="l" indent="0" marL="0">
-              <a:lnSpc>
-                <a:spcPts val="1620"/>
-              </a:lnSpc>
-              <a:spcAft>
-                <a:spcPts val="300"/>
-              </a:spcAft>
-              <a:buNone/>
-            </a:pPr>
-            <a:r>
-              <a:rPr lang="en-US" sz="1200" i="1" dirty="0">
-                <a:solidFill>
-                  <a:srgbClr val="1C2833"/>
-                </a:solidFill>
-                <a:latin typeface="Arial" pitchFamily="34" charset="0"/>
-                <a:ea typeface="Arial" pitchFamily="34" charset="-122"/>
-                <a:cs typeface="Arial" pitchFamily="34" charset="-120"/>
-              </a:rPr>
-              <a:t>origin</a:t>
-            </a:r>
-            <a:pPr algn="l" indent="0" marL="0">
-              <a:lnSpc>
-                <a:spcPts val="1620"/>
-              </a:lnSpc>
-              <a:spcAft>
-                <a:spcPts val="300"/>
-              </a:spcAft>
-              <a:buNone/>
-            </a:pPr>
-            <a:r>
-              <a:rPr lang="en-US" sz="1200" dirty="0">
-                <a:solidFill>
-                  <a:srgbClr val="1C2833"/>
-                </a:solidFill>
-                <a:latin typeface="Arial" pitchFamily="34" charset="0"/>
-                <a:ea typeface="Arial" pitchFamily="34" charset="-122"/>
-                <a:cs typeface="Arial" pitchFamily="34" charset="-120"/>
-              </a:rPr>
-              <a:t> of theatre?</a:t>
+              <a:t> covers theatre, music, dance — the foundational text for Indian classical performing arts.</a:t>
             </a:r>
             <a:endParaRPr lang="en-US" sz="1200" dirty="0"/>
           </a:p>
-          <a:p>
-            <a:pPr algn="l" marL="342900" indent="-342900">
-              <a:lnSpc>
-                <a:spcPts val="1620"/>
-              </a:lnSpc>
-              <a:spcAft>
-                <a:spcPts val="300"/>
-              </a:spcAft>
-              <a:buSzPct val="100000"/>
-              <a:buChar char="•"/>
-            </a:pPr>
-            <a:r>
-              <a:rPr lang="en-US" sz="1200" b="1" dirty="0">
-                <a:solidFill>
-                  <a:srgbClr val="1C2833"/>
-                </a:solidFill>
-                <a:latin typeface="Arial" pitchFamily="34" charset="0"/>
-                <a:ea typeface="Arial" pitchFamily="34" charset="-122"/>
-                <a:cs typeface="Arial" pitchFamily="34" charset="-120"/>
-              </a:rPr>
-              <a:t>Tier down:</a:t>
-            </a:r>
-            <a:pPr algn="l" indent="0" marL="0">
-              <a:lnSpc>
-                <a:spcPts val="1620"/>
-              </a:lnSpc>
-              <a:spcAft>
-                <a:spcPts val="300"/>
-              </a:spcAft>
-              <a:buNone/>
-            </a:pPr>
-            <a:r>
-              <a:rPr lang="en-US" sz="1200" dirty="0">
-                <a:solidFill>
-                  <a:srgbClr val="1C2833"/>
-                </a:solidFill>
-                <a:latin typeface="Arial" pitchFamily="34" charset="0"/>
-                <a:ea typeface="Arial" pitchFamily="34" charset="-122"/>
-                <a:cs typeface="Arial" pitchFamily="34" charset="-120"/>
-              </a:rPr>
-              <a:t> Memorise just the four Upavedas with one-line domains.</a:t>
-            </a:r>
-            <a:endParaRPr lang="en-US" sz="1200" dirty="0"/>
-          </a:p>
-        </p:txBody>
-      </p:sp>
-      <p:sp>
-        <p:nvSpPr>
-          <p:cNvPr id="5" name="Text 3"/>
+        </p:txBody>
+      </p:sp>
+      <p:sp>
+        <p:nvSpPr>
+          <p:cNvPr id="6" name="Text 4"/>
           <p:cNvSpPr/>
           <p:nvPr/>
         </p:nvSpPr>
@@ -2642,7 +3302,7 @@
                 <a:ea typeface="Georgia" pitchFamily="34" charset="-122"/>
                 <a:cs typeface="Georgia" pitchFamily="34" charset="-120"/>
               </a:rPr>
-              <a:t>Teacher notes</a:t>
+              <a:t>Core (20 min) (cont.)</a:t>
             </a:r>
             <a:endParaRPr lang="en-US" sz="1800" dirty="0"/>
           </a:p>
@@ -2657,7 +3317,7 @@
         <p:spPr>
           <a:xfrm>
             <a:off x="406301" y="870942"/>
-            <a:ext cx="8498026" cy="853083"/>
+            <a:ext cx="8498026" cy="426541"/>
           </a:xfrm>
           <a:prstGeom prst="rect">
             <a:avLst/>
@@ -2682,6 +3342,29 @@
               <a:buNone/>
             </a:pPr>
             <a:r>
+              <a:rPr lang="en-US" sz="1200" b="1" dirty="0">
+                <a:solidFill>
+                  <a:srgbClr val="1C2833"/>
+                </a:solidFill>
+                <a:latin typeface="Arial" pitchFamily="34" charset="0"/>
+                <a:ea typeface="Arial" pitchFamily="34" charset="-122"/>
+                <a:cs typeface="Arial" pitchFamily="34" charset="-120"/>
+              </a:rPr>
+              <a:t>Arthaśāstra</a:t>
+            </a:r>
+            <a:pPr algn="l" indent="0" marL="0">
+              <a:lnSpc>
+                <a:spcPts val="1680"/>
+              </a:lnSpc>
+              <a:spcBef>
+                <a:spcPts val="300"/>
+              </a:spcBef>
+              <a:spcAft>
+                <a:spcPts val="300"/>
+              </a:spcAft>
+              <a:buNone/>
+            </a:pPr>
+            <a:r>
               <a:rPr lang="en-US" sz="1200" dirty="0">
                 <a:solidFill>
                   <a:srgbClr val="1C2833"/>
@@ -2690,7 +3373,53 @@
                 <a:ea typeface="Arial" pitchFamily="34" charset="-122"/>
                 <a:cs typeface="Arial" pitchFamily="34" charset="-120"/>
               </a:rPr>
-              <a:t>– The classification of Upavedas is somewhat traditional and not perfectly clean. Some sources include 5 (adding Sthāpatya-veda — architecture). Stick to 4 for clarity; mention the 5th briefly. – The Sushruta-nose-reconstruction history is genuine; European surgeons did learn the technique via 18th-century Bengali practitioners. It's a documented case of pre-modern Indian medical knowledge influencing modern medicine.</a:t>
+              <a:t> — Kauṭilya (a.k.a. Cāṇakya) wrote a treatise on statecraft, economics, and governance. Compared sometimes to Machiavelli's </a:t>
+            </a:r>
+            <a:pPr algn="l" indent="0" marL="0">
+              <a:lnSpc>
+                <a:spcPts val="1680"/>
+              </a:lnSpc>
+              <a:spcBef>
+                <a:spcPts val="300"/>
+              </a:spcBef>
+              <a:spcAft>
+                <a:spcPts val="300"/>
+              </a:spcAft>
+              <a:buNone/>
+            </a:pPr>
+            <a:r>
+              <a:rPr lang="en-US" sz="1200" i="1" dirty="0">
+                <a:solidFill>
+                  <a:srgbClr val="1C2833"/>
+                </a:solidFill>
+                <a:latin typeface="Arial" pitchFamily="34" charset="0"/>
+                <a:ea typeface="Arial" pitchFamily="34" charset="-122"/>
+                <a:cs typeface="Arial" pitchFamily="34" charset="-120"/>
+              </a:rPr>
+              <a:t>Prince</a:t>
+            </a:r>
+            <a:pPr algn="l" indent="0" marL="0">
+              <a:lnSpc>
+                <a:spcPts val="1680"/>
+              </a:lnSpc>
+              <a:spcBef>
+                <a:spcPts val="300"/>
+              </a:spcBef>
+              <a:spcAft>
+                <a:spcPts val="300"/>
+              </a:spcAft>
+              <a:buNone/>
+            </a:pPr>
+            <a:r>
+              <a:rPr lang="en-US" sz="1200" dirty="0">
+                <a:solidFill>
+                  <a:srgbClr val="1C2833"/>
+                </a:solidFill>
+                <a:latin typeface="Arial" pitchFamily="34" charset="0"/>
+                <a:ea typeface="Arial" pitchFamily="34" charset="-122"/>
+                <a:cs typeface="Arial" pitchFamily="34" charset="-120"/>
+              </a:rPr>
+              <a:t>, but ~1800 years older and more systematic.</a:t>
             </a:r>
             <a:endParaRPr lang="en-US" sz="1200" dirty="0"/>
           </a:p>
@@ -2699,6 +3428,158 @@
       <p:sp>
         <p:nvSpPr>
           <p:cNvPr id="5" name="Text 3"/>
+          <p:cNvSpPr/>
+          <p:nvPr/>
+        </p:nvSpPr>
+        <p:spPr>
+          <a:xfrm>
+            <a:off x="634901" y="1386334"/>
+            <a:ext cx="8102798" cy="281880"/>
+          </a:xfrm>
+          <a:prstGeom prst="rect">
+            <a:avLst/>
+          </a:prstGeom>
+          <a:noFill/>
+          <a:ln/>
+        </p:spPr>
+        <p:txBody>
+          <a:bodyPr wrap="square" lIns="0" tIns="0" rIns="0" bIns="0" rtlCol="0" anchor="t"/>
+          <a:lstStyle/>
+          <a:p>
+            <a:pPr algn="l" marL="342900" indent="-342900">
+              <a:lnSpc>
+                <a:spcPts val="1620"/>
+              </a:lnSpc>
+              <a:spcAft>
+                <a:spcPts val="300"/>
+              </a:spcAft>
+              <a:buSzPct val="100000"/>
+              <a:buChar char="•"/>
+            </a:pPr>
+            <a:r>
+              <a:rPr lang="en-US" sz="1200" b="1" dirty="0">
+                <a:solidFill>
+                  <a:srgbClr val="1C2833"/>
+                </a:solidFill>
+                <a:latin typeface="Arial" pitchFamily="34" charset="0"/>
+                <a:ea typeface="Arial" pitchFamily="34" charset="-122"/>
+                <a:cs typeface="Arial" pitchFamily="34" charset="-120"/>
+              </a:rPr>
+              <a:t>A specific Upaveda achievement to remember:</a:t>
+            </a:r>
+            <a:endParaRPr lang="en-US" sz="1200" dirty="0"/>
+          </a:p>
+        </p:txBody>
+      </p:sp>
+      <p:sp>
+        <p:nvSpPr>
+          <p:cNvPr id="6" name="Text 4"/>
+          <p:cNvSpPr/>
+          <p:nvPr/>
+        </p:nvSpPr>
+        <p:spPr>
+          <a:xfrm>
+            <a:off x="634901" y="1769715"/>
+            <a:ext cx="8102798" cy="693241"/>
+          </a:xfrm>
+          <a:prstGeom prst="rect">
+            <a:avLst/>
+          </a:prstGeom>
+          <a:noFill/>
+          <a:ln/>
+        </p:spPr>
+        <p:txBody>
+          <a:bodyPr wrap="square" lIns="0" tIns="0" rIns="0" bIns="0" rtlCol="0" anchor="t"/>
+          <a:lstStyle/>
+          <a:p>
+            <a:pPr algn="l" marL="342900" indent="-342900">
+              <a:lnSpc>
+                <a:spcPts val="1620"/>
+              </a:lnSpc>
+              <a:spcAft>
+                <a:spcPts val="300"/>
+              </a:spcAft>
+              <a:buSzPct val="100000"/>
+              <a:buChar char="•"/>
+            </a:pPr>
+            <a:r>
+              <a:rPr lang="en-US" sz="1200" b="1" dirty="0">
+                <a:solidFill>
+                  <a:srgbClr val="1C2833"/>
+                </a:solidFill>
+                <a:latin typeface="Arial" pitchFamily="34" charset="0"/>
+                <a:ea typeface="Arial" pitchFamily="34" charset="-122"/>
+                <a:cs typeface="Arial" pitchFamily="34" charset="-120"/>
+              </a:rPr>
+              <a:t>Suśruta's surgery</a:t>
+            </a:r>
+            <a:pPr algn="l" indent="0" marL="0">
+              <a:lnSpc>
+                <a:spcPts val="1620"/>
+              </a:lnSpc>
+              <a:spcAft>
+                <a:spcPts val="300"/>
+              </a:spcAft>
+              <a:buNone/>
+            </a:pPr>
+            <a:r>
+              <a:rPr lang="en-US" sz="1200" dirty="0">
+                <a:solidFill>
+                  <a:srgbClr val="1C2833"/>
+                </a:solidFill>
+                <a:latin typeface="Arial" pitchFamily="34" charset="0"/>
+                <a:ea typeface="Arial" pitchFamily="34" charset="-122"/>
+                <a:cs typeface="Arial" pitchFamily="34" charset="-120"/>
+              </a:rPr>
+              <a:t> (~6th c. BCE or earlier): the </a:t>
+            </a:r>
+            <a:pPr algn="l" indent="0" marL="0">
+              <a:lnSpc>
+                <a:spcPts val="1620"/>
+              </a:lnSpc>
+              <a:spcAft>
+                <a:spcPts val="300"/>
+              </a:spcAft>
+              <a:buNone/>
+            </a:pPr>
+            <a:r>
+              <a:rPr lang="en-US" sz="1200" i="1" dirty="0">
+                <a:solidFill>
+                  <a:srgbClr val="1C2833"/>
+                </a:solidFill>
+                <a:latin typeface="Arial" pitchFamily="34" charset="0"/>
+                <a:ea typeface="Arial" pitchFamily="34" charset="-122"/>
+                <a:cs typeface="Arial" pitchFamily="34" charset="-120"/>
+              </a:rPr>
+              <a:t>Suśruta Saṃhitā</a:t>
+            </a:r>
+            <a:pPr algn="l" indent="0" marL="0">
+              <a:lnSpc>
+                <a:spcPts val="1620"/>
+              </a:lnSpc>
+              <a:spcAft>
+                <a:spcPts val="300"/>
+              </a:spcAft>
+              <a:buNone/>
+            </a:pPr>
+            <a:r>
+              <a:rPr lang="en-US" sz="1200" dirty="0">
+                <a:solidFill>
+                  <a:srgbClr val="1C2833"/>
+                </a:solidFill>
+                <a:latin typeface="Arial" pitchFamily="34" charset="0"/>
+                <a:ea typeface="Arial" pitchFamily="34" charset="-122"/>
+                <a:cs typeface="Arial" pitchFamily="34" charset="-120"/>
+              </a:rPr>
+              <a:t> describes 300+ surgical procedures including cataract surgery and rhinoplasty (plastic surgery on the nose). The "Sushruta nose" reconstruction technique was learned by European surgeons via translation in the 18th century.</a:t>
+            </a:r>
+            <a:endParaRPr lang="en-US" sz="1200" dirty="0"/>
+          </a:p>
+        </p:txBody>
+      </p:sp>
+      <p:sp>
+        <p:nvSpPr>
+          <p:cNvPr id="7" name="Text 5"/>
           <p:cNvSpPr/>
           <p:nvPr/>
         </p:nvSpPr>
@@ -2848,7 +3729,7 @@
                 <a:ea typeface="Georgia" pitchFamily="34" charset="-122"/>
                 <a:cs typeface="Georgia" pitchFamily="34" charset="-120"/>
               </a:rPr>
-              <a:t>Citation(s) used</a:t>
+              <a:t>Activity (15 min) — Match an Upaveda to a problem</a:t>
             </a:r>
             <a:endParaRPr lang="en-US" sz="1800" dirty="0"/>
           </a:p>
@@ -2863,7 +3744,7 @@
         <p:spPr>
           <a:xfrm>
             <a:off x="406301" y="870942"/>
-            <a:ext cx="8498026" cy="426541"/>
+            <a:ext cx="8498026" cy="213271"/>
           </a:xfrm>
           <a:prstGeom prst="rect">
             <a:avLst/>
@@ -2896,8 +3777,33 @@
                 <a:ea typeface="Arial" pitchFamily="34" charset="-122"/>
                 <a:cs typeface="Arial" pitchFamily="34" charset="-120"/>
               </a:rPr>
-              <a:t>– Wujastyk (2003) on Caraka &amp; Suśruta. – Boesche, R. (2003). </a:t>
-            </a:r>
+              <a:t>Teacher gives 5 modern problems on the board. Students decide which Upaveda's tradition would have addressed each:</a:t>
+            </a:r>
+            <a:endParaRPr lang="en-US" sz="1200" dirty="0"/>
+          </a:p>
+        </p:txBody>
+      </p:sp>
+      <p:sp>
+        <p:nvSpPr>
+          <p:cNvPr id="5" name="Text 3"/>
+          <p:cNvSpPr/>
+          <p:nvPr/>
+        </p:nvSpPr>
+        <p:spPr>
+          <a:xfrm>
+            <a:off x="406301" y="4434929"/>
+            <a:ext cx="8498026" cy="213271"/>
+          </a:xfrm>
+          <a:prstGeom prst="rect">
+            <a:avLst/>
+          </a:prstGeom>
+          <a:noFill/>
+          <a:ln/>
+        </p:spPr>
+        <p:txBody>
+          <a:bodyPr wrap="square" lIns="0" tIns="0" rIns="0" bIns="0" rtlCol="0" anchor="t"/>
+          <a:lstStyle/>
+          <a:p>
             <a:pPr algn="l" indent="0" marL="0">
               <a:lnSpc>
                 <a:spcPts val="1680"/>
@@ -2911,6 +3817,688 @@
               <a:buNone/>
             </a:pPr>
             <a:r>
+              <a:rPr lang="en-US" sz="1200" dirty="0">
+                <a:solidFill>
+                  <a:srgbClr val="1C2833"/>
+                </a:solidFill>
+                <a:latin typeface="Arial" pitchFamily="34" charset="0"/>
+                <a:ea typeface="Arial" pitchFamily="34" charset="-122"/>
+                <a:cs typeface="Arial" pitchFamily="34" charset="-120"/>
+              </a:rPr>
+              <a:t>Middle ·  · IKS Curriculum</a:t>
+            </a:r>
+            <a:endParaRPr lang="en-US" sz="1200" dirty="0"/>
+          </a:p>
+        </p:txBody>
+      </p:sp>
+    </p:spTree>
+  </p:cSld>
+  <p:clrMapOvr>
+    <a:masterClrMapping/>
+  </p:clrMapOvr>
+</p:sld>
+</file>
+
+<file path=ppt/slides/slide13.xml><?xml version="1.0" encoding="utf-8"?>
+<p:sld xmlns:a="http://schemas.openxmlformats.org/drawingml/2006/main" xmlns:r="http://schemas.openxmlformats.org/officeDocument/2006/relationships" xmlns:p="http://schemas.openxmlformats.org/presentationml/2006/main">
+  <p:cSld name="Slide 13">
+    <p:bg>
+      <p:bgPr>
+        <a:solidFill>
+          <a:srgbClr val="FFFFFF"/>
+        </a:solidFill>
+      </p:bgPr>
+    </p:bg>
+    <p:spTree>
+      <p:nvGrpSpPr>
+        <p:cNvPr id="1" name=""/>
+        <p:cNvGrpSpPr/>
+        <p:nvPr/>
+      </p:nvGrpSpPr>
+      <p:grpSpPr>
+        <a:xfrm>
+          <a:off x="0" y="0"/>
+          <a:ext cx="0" cy="0"/>
+          <a:chOff x="0" y="0"/>
+          <a:chExt cx="0" cy="0"/>
+        </a:xfrm>
+      </p:grpSpPr>
+      <p:sp>
+        <p:nvSpPr>
+          <p:cNvPr id="2" name="Text 0"/>
+          <p:cNvSpPr/>
+          <p:nvPr/>
+        </p:nvSpPr>
+        <p:spPr>
+          <a:xfrm>
+            <a:off x="0" y="0"/>
+            <a:ext cx="9144000" cy="101501"/>
+          </a:xfrm>
+          <a:prstGeom prst="rect">
+            <a:avLst/>
+          </a:prstGeom>
+          <a:solidFill>
+            <a:srgbClr val="277884"/>
+          </a:solidFill>
+          <a:ln/>
+        </p:spPr>
+        <p:txBody>
+          <a:bodyPr wrap="square" rtlCol="0" anchor="ctr"/>
+          <a:lstStyle/>
+          <a:p>
+            <a:pPr indent="0" marL="0">
+              <a:buNone/>
+            </a:pPr>
+            <a:endParaRPr lang="en-US" dirty="0"/>
+          </a:p>
+        </p:txBody>
+      </p:sp>
+      <p:sp>
+        <p:nvSpPr>
+          <p:cNvPr id="3" name="Text 1"/>
+          <p:cNvSpPr/>
+          <p:nvPr/>
+        </p:nvSpPr>
+        <p:spPr>
+          <a:xfrm>
+            <a:off x="406301" y="457051"/>
+            <a:ext cx="8498026" cy="274290"/>
+          </a:xfrm>
+          <a:prstGeom prst="rect">
+            <a:avLst/>
+          </a:prstGeom>
+          <a:noFill/>
+          <a:ln/>
+        </p:spPr>
+        <p:txBody>
+          <a:bodyPr wrap="square" lIns="0" tIns="0" rIns="0" bIns="0" rtlCol="0" anchor="t"/>
+          <a:lstStyle/>
+          <a:p>
+            <a:pPr algn="l" indent="0" marL="0">
+              <a:lnSpc>
+                <a:spcPts val="2160"/>
+              </a:lnSpc>
+              <a:spcBef>
+                <a:spcPts val="600"/>
+              </a:spcBef>
+              <a:spcAft>
+                <a:spcPts val="800"/>
+              </a:spcAft>
+              <a:buNone/>
+            </a:pPr>
+            <a:r>
+              <a:rPr lang="en-US" sz="1800" b="1" dirty="0">
+                <a:solidFill>
+                  <a:srgbClr val="FE4447"/>
+                </a:solidFill>
+                <a:latin typeface="Georgia" pitchFamily="34" charset="0"/>
+                <a:ea typeface="Georgia" pitchFamily="34" charset="-122"/>
+                <a:cs typeface="Georgia" pitchFamily="34" charset="-120"/>
+              </a:rPr>
+              <a:t>Activity (15 min) — Match an Upaveda to a problem (cont.)</a:t>
+            </a:r>
+            <a:endParaRPr lang="en-US" sz="1800" dirty="0"/>
+          </a:p>
+        </p:txBody>
+      </p:sp>
+      <p:sp>
+        <p:nvSpPr>
+          <p:cNvPr id="4" name="Text 2"/>
+          <p:cNvSpPr/>
+          <p:nvPr/>
+        </p:nvSpPr>
+        <p:spPr>
+          <a:xfrm>
+            <a:off x="634901" y="883593"/>
+            <a:ext cx="8102798" cy="1257002"/>
+          </a:xfrm>
+          <a:prstGeom prst="rect">
+            <a:avLst/>
+          </a:prstGeom>
+          <a:noFill/>
+          <a:ln/>
+        </p:spPr>
+        <p:txBody>
+          <a:bodyPr wrap="square" lIns="0" tIns="0" rIns="0" bIns="0" rtlCol="0" anchor="t"/>
+          <a:lstStyle/>
+          <a:p>
+            <a:pPr algn="l" marL="342900" indent="-342900">
+              <a:lnSpc>
+                <a:spcPts val="1620"/>
+              </a:lnSpc>
+              <a:spcAft>
+                <a:spcPts val="300"/>
+              </a:spcAft>
+              <a:buSzPct val="100000"/>
+              <a:buChar char="•"/>
+            </a:pPr>
+            <a:r>
+              <a:rPr lang="en-US" sz="1200" dirty="0">
+                <a:solidFill>
+                  <a:srgbClr val="1C2833"/>
+                </a:solidFill>
+                <a:latin typeface="Arial" pitchFamily="34" charset="0"/>
+                <a:ea typeface="Arial" pitchFamily="34" charset="-122"/>
+                <a:cs typeface="Arial" pitchFamily="34" charset="-120"/>
+              </a:rPr>
+              <a:t>"I have a chronic skin issue, what would the tradition suggest?" (Āyurveda)</a:t>
+            </a:r>
+            <a:endParaRPr lang="en-US" sz="1200" dirty="0"/>
+          </a:p>
+          <a:p>
+            <a:pPr algn="l" marL="342900" indent="-342900">
+              <a:lnSpc>
+                <a:spcPts val="1620"/>
+              </a:lnSpc>
+              <a:spcAft>
+                <a:spcPts val="300"/>
+              </a:spcAft>
+              <a:buSzPct val="100000"/>
+              <a:buChar char="•"/>
+            </a:pPr>
+            <a:r>
+              <a:rPr lang="en-US" sz="1200" dirty="0">
+                <a:solidFill>
+                  <a:srgbClr val="1C2833"/>
+                </a:solidFill>
+                <a:latin typeface="Arial" pitchFamily="34" charset="0"/>
+                <a:ea typeface="Arial" pitchFamily="34" charset="-122"/>
+                <a:cs typeface="Arial" pitchFamily="34" charset="-120"/>
+              </a:rPr>
+              <a:t>"Our city needs a new defence strategy" (Dhanurveda + Arthaśāstra)</a:t>
+            </a:r>
+            <a:endParaRPr lang="en-US" sz="1200" dirty="0"/>
+          </a:p>
+          <a:p>
+            <a:pPr algn="l" marL="342900" indent="-342900">
+              <a:lnSpc>
+                <a:spcPts val="1620"/>
+              </a:lnSpc>
+              <a:spcAft>
+                <a:spcPts val="300"/>
+              </a:spcAft>
+              <a:buSzPct val="100000"/>
+              <a:buChar char="•"/>
+            </a:pPr>
+            <a:r>
+              <a:rPr lang="en-US" sz="1200" dirty="0">
+                <a:solidFill>
+                  <a:srgbClr val="1C2833"/>
+                </a:solidFill>
+                <a:latin typeface="Arial" pitchFamily="34" charset="0"/>
+                <a:ea typeface="Arial" pitchFamily="34" charset="-122"/>
+                <a:cs typeface="Arial" pitchFamily="34" charset="-120"/>
+              </a:rPr>
+              <a:t>"How should taxes be calculated for the rainy season?" (Arthaśāstra)</a:t>
+            </a:r>
+            <a:endParaRPr lang="en-US" sz="1200" dirty="0"/>
+          </a:p>
+          <a:p>
+            <a:pPr algn="l" marL="342900" indent="-342900">
+              <a:lnSpc>
+                <a:spcPts val="1620"/>
+              </a:lnSpc>
+              <a:spcAft>
+                <a:spcPts val="300"/>
+              </a:spcAft>
+              <a:buSzPct val="100000"/>
+              <a:buChar char="•"/>
+            </a:pPr>
+            <a:r>
+              <a:rPr lang="en-US" sz="1200" dirty="0">
+                <a:solidFill>
+                  <a:srgbClr val="1C2833"/>
+                </a:solidFill>
+                <a:latin typeface="Arial" pitchFamily="34" charset="0"/>
+                <a:ea typeface="Arial" pitchFamily="34" charset="-122"/>
+                <a:cs typeface="Arial" pitchFamily="34" charset="-120"/>
+              </a:rPr>
+              <a:t>"I want to learn a new rāga on the vīṇā" (Gandharvaveda)</a:t>
+            </a:r>
+            <a:endParaRPr lang="en-US" sz="1200" dirty="0"/>
+          </a:p>
+          <a:p>
+            <a:pPr algn="l" marL="342900" indent="-342900">
+              <a:lnSpc>
+                <a:spcPts val="1620"/>
+              </a:lnSpc>
+              <a:spcAft>
+                <a:spcPts val="300"/>
+              </a:spcAft>
+              <a:buSzPct val="100000"/>
+              <a:buChar char="•"/>
+            </a:pPr>
+            <a:r>
+              <a:rPr lang="en-US" sz="1200" dirty="0">
+                <a:solidFill>
+                  <a:srgbClr val="1C2833"/>
+                </a:solidFill>
+                <a:latin typeface="Arial" pitchFamily="34" charset="0"/>
+                <a:ea typeface="Arial" pitchFamily="34" charset="-122"/>
+                <a:cs typeface="Arial" pitchFamily="34" charset="-120"/>
+              </a:rPr>
+              <a:t>"Our king wants to build a court of judges" (Arthaśāstra)</a:t>
+            </a:r>
+            <a:endParaRPr lang="en-US" sz="1200" dirty="0"/>
+          </a:p>
+        </p:txBody>
+      </p:sp>
+      <p:sp>
+        <p:nvSpPr>
+          <p:cNvPr id="5" name="Text 3"/>
+          <p:cNvSpPr/>
+          <p:nvPr/>
+        </p:nvSpPr>
+        <p:spPr>
+          <a:xfrm>
+            <a:off x="406301" y="4434929"/>
+            <a:ext cx="8498026" cy="213271"/>
+          </a:xfrm>
+          <a:prstGeom prst="rect">
+            <a:avLst/>
+          </a:prstGeom>
+          <a:noFill/>
+          <a:ln/>
+        </p:spPr>
+        <p:txBody>
+          <a:bodyPr wrap="square" lIns="0" tIns="0" rIns="0" bIns="0" rtlCol="0" anchor="t"/>
+          <a:lstStyle/>
+          <a:p>
+            <a:pPr algn="l" indent="0" marL="0">
+              <a:lnSpc>
+                <a:spcPts val="1680"/>
+              </a:lnSpc>
+              <a:spcBef>
+                <a:spcPts val="300"/>
+              </a:spcBef>
+              <a:spcAft>
+                <a:spcPts val="300"/>
+              </a:spcAft>
+              <a:buNone/>
+            </a:pPr>
+            <a:r>
+              <a:rPr lang="en-US" sz="1200" dirty="0">
+                <a:solidFill>
+                  <a:srgbClr val="1C2833"/>
+                </a:solidFill>
+                <a:latin typeface="Arial" pitchFamily="34" charset="0"/>
+                <a:ea typeface="Arial" pitchFamily="34" charset="-122"/>
+                <a:cs typeface="Arial" pitchFamily="34" charset="-120"/>
+              </a:rPr>
+              <a:t>Middle ·  · IKS Curriculum</a:t>
+            </a:r>
+            <a:endParaRPr lang="en-US" sz="1200" dirty="0"/>
+          </a:p>
+        </p:txBody>
+      </p:sp>
+    </p:spTree>
+  </p:cSld>
+  <p:clrMapOvr>
+    <a:masterClrMapping/>
+  </p:clrMapOvr>
+</p:sld>
+</file>
+
+<file path=ppt/slides/slide14.xml><?xml version="1.0" encoding="utf-8"?>
+<p:sld xmlns:a="http://schemas.openxmlformats.org/drawingml/2006/main" xmlns:r="http://schemas.openxmlformats.org/officeDocument/2006/relationships" xmlns:p="http://schemas.openxmlformats.org/presentationml/2006/main">
+  <p:cSld name="Slide 14">
+    <p:bg>
+      <p:bgPr>
+        <a:solidFill>
+          <a:srgbClr val="FFFFFF"/>
+        </a:solidFill>
+      </p:bgPr>
+    </p:bg>
+    <p:spTree>
+      <p:nvGrpSpPr>
+        <p:cNvPr id="1" name=""/>
+        <p:cNvGrpSpPr/>
+        <p:nvPr/>
+      </p:nvGrpSpPr>
+      <p:grpSpPr>
+        <a:xfrm>
+          <a:off x="0" y="0"/>
+          <a:ext cx="0" cy="0"/>
+          <a:chOff x="0" y="0"/>
+          <a:chExt cx="0" cy="0"/>
+        </a:xfrm>
+      </p:grpSpPr>
+      <p:sp>
+        <p:nvSpPr>
+          <p:cNvPr id="2" name="Text 0"/>
+          <p:cNvSpPr/>
+          <p:nvPr/>
+        </p:nvSpPr>
+        <p:spPr>
+          <a:xfrm>
+            <a:off x="0" y="0"/>
+            <a:ext cx="9144000" cy="101501"/>
+          </a:xfrm>
+          <a:prstGeom prst="rect">
+            <a:avLst/>
+          </a:prstGeom>
+          <a:solidFill>
+            <a:srgbClr val="277884"/>
+          </a:solidFill>
+          <a:ln/>
+        </p:spPr>
+        <p:txBody>
+          <a:bodyPr wrap="square" rtlCol="0" anchor="ctr"/>
+          <a:lstStyle/>
+          <a:p>
+            <a:pPr indent="0" marL="0">
+              <a:buNone/>
+            </a:pPr>
+            <a:endParaRPr lang="en-US" dirty="0"/>
+          </a:p>
+        </p:txBody>
+      </p:sp>
+      <p:sp>
+        <p:nvSpPr>
+          <p:cNvPr id="3" name="Text 1"/>
+          <p:cNvSpPr/>
+          <p:nvPr/>
+        </p:nvSpPr>
+        <p:spPr>
+          <a:xfrm>
+            <a:off x="406301" y="457051"/>
+            <a:ext cx="8498026" cy="274290"/>
+          </a:xfrm>
+          <a:prstGeom prst="rect">
+            <a:avLst/>
+          </a:prstGeom>
+          <a:noFill/>
+          <a:ln/>
+        </p:spPr>
+        <p:txBody>
+          <a:bodyPr wrap="square" lIns="0" tIns="0" rIns="0" bIns="0" rtlCol="0" anchor="t"/>
+          <a:lstStyle/>
+          <a:p>
+            <a:pPr algn="l" indent="0" marL="0">
+              <a:lnSpc>
+                <a:spcPts val="2160"/>
+              </a:lnSpc>
+              <a:spcBef>
+                <a:spcPts val="600"/>
+              </a:spcBef>
+              <a:spcAft>
+                <a:spcPts val="800"/>
+              </a:spcAft>
+              <a:buNone/>
+            </a:pPr>
+            <a:r>
+              <a:rPr lang="en-US" sz="1800" b="1" dirty="0">
+                <a:solidFill>
+                  <a:srgbClr val="FE4447"/>
+                </a:solidFill>
+                <a:latin typeface="Georgia" pitchFamily="34" charset="0"/>
+                <a:ea typeface="Georgia" pitchFamily="34" charset="-122"/>
+                <a:cs typeface="Georgia" pitchFamily="34" charset="-120"/>
+              </a:rPr>
+              <a:t>Activity (15 min) — Match an Upaveda to a problem (cont.)</a:t>
+            </a:r>
+            <a:endParaRPr lang="en-US" sz="1800" dirty="0"/>
+          </a:p>
+        </p:txBody>
+      </p:sp>
+      <p:sp>
+        <p:nvSpPr>
+          <p:cNvPr id="4" name="Text 2"/>
+          <p:cNvSpPr/>
+          <p:nvPr/>
+        </p:nvSpPr>
+        <p:spPr>
+          <a:xfrm>
+            <a:off x="406301" y="870942"/>
+            <a:ext cx="8498026" cy="213271"/>
+          </a:xfrm>
+          <a:prstGeom prst="rect">
+            <a:avLst/>
+          </a:prstGeom>
+          <a:noFill/>
+          <a:ln/>
+        </p:spPr>
+        <p:txBody>
+          <a:bodyPr wrap="square" lIns="0" tIns="0" rIns="0" bIns="0" rtlCol="0" anchor="t"/>
+          <a:lstStyle/>
+          <a:p>
+            <a:pPr algn="l" indent="0" marL="0">
+              <a:lnSpc>
+                <a:spcPts val="1680"/>
+              </a:lnSpc>
+              <a:spcBef>
+                <a:spcPts val="300"/>
+              </a:spcBef>
+              <a:spcAft>
+                <a:spcPts val="300"/>
+              </a:spcAft>
+              <a:buNone/>
+            </a:pPr>
+            <a:r>
+              <a:rPr lang="en-US" sz="1200" dirty="0">
+                <a:solidFill>
+                  <a:srgbClr val="1C2833"/>
+                </a:solidFill>
+                <a:latin typeface="Arial" pitchFamily="34" charset="0"/>
+                <a:ea typeface="Arial" pitchFamily="34" charset="-122"/>
+                <a:cs typeface="Arial" pitchFamily="34" charset="-120"/>
+              </a:rPr>
+              <a:t>Discuss: where would Suśruta have fit? (Āyurveda — surgery is a subdomain of medicine in this scheme.)</a:t>
+            </a:r>
+            <a:endParaRPr lang="en-US" sz="1200" dirty="0"/>
+          </a:p>
+        </p:txBody>
+      </p:sp>
+      <p:sp>
+        <p:nvSpPr>
+          <p:cNvPr id="5" name="Text 3"/>
+          <p:cNvSpPr/>
+          <p:nvPr/>
+        </p:nvSpPr>
+        <p:spPr>
+          <a:xfrm>
+            <a:off x="406301" y="4434929"/>
+            <a:ext cx="8498026" cy="213271"/>
+          </a:xfrm>
+          <a:prstGeom prst="rect">
+            <a:avLst/>
+          </a:prstGeom>
+          <a:noFill/>
+          <a:ln/>
+        </p:spPr>
+        <p:txBody>
+          <a:bodyPr wrap="square" lIns="0" tIns="0" rIns="0" bIns="0" rtlCol="0" anchor="t"/>
+          <a:lstStyle/>
+          <a:p>
+            <a:pPr algn="l" indent="0" marL="0">
+              <a:lnSpc>
+                <a:spcPts val="1680"/>
+              </a:lnSpc>
+              <a:spcBef>
+                <a:spcPts val="300"/>
+              </a:spcBef>
+              <a:spcAft>
+                <a:spcPts val="300"/>
+              </a:spcAft>
+              <a:buNone/>
+            </a:pPr>
+            <a:r>
+              <a:rPr lang="en-US" sz="1200" dirty="0">
+                <a:solidFill>
+                  <a:srgbClr val="1C2833"/>
+                </a:solidFill>
+                <a:latin typeface="Arial" pitchFamily="34" charset="0"/>
+                <a:ea typeface="Arial" pitchFamily="34" charset="-122"/>
+                <a:cs typeface="Arial" pitchFamily="34" charset="-120"/>
+              </a:rPr>
+              <a:t>Middle ·  · IKS Curriculum</a:t>
+            </a:r>
+            <a:endParaRPr lang="en-US" sz="1200" dirty="0"/>
+          </a:p>
+        </p:txBody>
+      </p:sp>
+    </p:spTree>
+  </p:cSld>
+  <p:clrMapOvr>
+    <a:masterClrMapping/>
+  </p:clrMapOvr>
+</p:sld>
+</file>
+
+<file path=ppt/slides/slide15.xml><?xml version="1.0" encoding="utf-8"?>
+<p:sld xmlns:a="http://schemas.openxmlformats.org/drawingml/2006/main" xmlns:r="http://schemas.openxmlformats.org/officeDocument/2006/relationships" xmlns:p="http://schemas.openxmlformats.org/presentationml/2006/main">
+  <p:cSld name="Slide 15">
+    <p:bg>
+      <p:bgPr>
+        <a:solidFill>
+          <a:srgbClr val="FFFFFF"/>
+        </a:solidFill>
+      </p:bgPr>
+    </p:bg>
+    <p:spTree>
+      <p:nvGrpSpPr>
+        <p:cNvPr id="1" name=""/>
+        <p:cNvGrpSpPr/>
+        <p:nvPr/>
+      </p:nvGrpSpPr>
+      <p:grpSpPr>
+        <a:xfrm>
+          <a:off x="0" y="0"/>
+          <a:ext cx="0" cy="0"/>
+          <a:chOff x="0" y="0"/>
+          <a:chExt cx="0" cy="0"/>
+        </a:xfrm>
+      </p:grpSpPr>
+      <p:sp>
+        <p:nvSpPr>
+          <p:cNvPr id="2" name="Text 0"/>
+          <p:cNvSpPr/>
+          <p:nvPr/>
+        </p:nvSpPr>
+        <p:spPr>
+          <a:xfrm>
+            <a:off x="0" y="0"/>
+            <a:ext cx="9144000" cy="101501"/>
+          </a:xfrm>
+          <a:prstGeom prst="rect">
+            <a:avLst/>
+          </a:prstGeom>
+          <a:solidFill>
+            <a:srgbClr val="277884"/>
+          </a:solidFill>
+          <a:ln/>
+        </p:spPr>
+        <p:txBody>
+          <a:bodyPr wrap="square" rtlCol="0" anchor="ctr"/>
+          <a:lstStyle/>
+          <a:p>
+            <a:pPr indent="0" marL="0">
+              <a:buNone/>
+            </a:pPr>
+            <a:endParaRPr lang="en-US" dirty="0"/>
+          </a:p>
+        </p:txBody>
+      </p:sp>
+      <p:sp>
+        <p:nvSpPr>
+          <p:cNvPr id="3" name="Text 1"/>
+          <p:cNvSpPr/>
+          <p:nvPr/>
+        </p:nvSpPr>
+        <p:spPr>
+          <a:xfrm>
+            <a:off x="406301" y="457051"/>
+            <a:ext cx="8498026" cy="274290"/>
+          </a:xfrm>
+          <a:prstGeom prst="rect">
+            <a:avLst/>
+          </a:prstGeom>
+          <a:noFill/>
+          <a:ln/>
+        </p:spPr>
+        <p:txBody>
+          <a:bodyPr wrap="square" lIns="0" tIns="0" rIns="0" bIns="0" rtlCol="0" anchor="t"/>
+          <a:lstStyle/>
+          <a:p>
+            <a:pPr algn="l" indent="0" marL="0">
+              <a:lnSpc>
+                <a:spcPts val="2160"/>
+              </a:lnSpc>
+              <a:spcBef>
+                <a:spcPts val="600"/>
+              </a:spcBef>
+              <a:spcAft>
+                <a:spcPts val="800"/>
+              </a:spcAft>
+              <a:buNone/>
+            </a:pPr>
+            <a:r>
+              <a:rPr lang="en-US" sz="1800" b="1" dirty="0">
+                <a:solidFill>
+                  <a:srgbClr val="FE4447"/>
+                </a:solidFill>
+                <a:latin typeface="Georgia" pitchFamily="34" charset="0"/>
+                <a:ea typeface="Georgia" pitchFamily="34" charset="-122"/>
+                <a:cs typeface="Georgia" pitchFamily="34" charset="-120"/>
+              </a:rPr>
+              <a:t>Wrap-up (5 min)</a:t>
+            </a:r>
+            <a:endParaRPr lang="en-US" sz="1800" dirty="0"/>
+          </a:p>
+        </p:txBody>
+      </p:sp>
+      <p:sp>
+        <p:nvSpPr>
+          <p:cNvPr id="4" name="Text 2"/>
+          <p:cNvSpPr/>
+          <p:nvPr/>
+        </p:nvSpPr>
+        <p:spPr>
+          <a:xfrm>
+            <a:off x="634901" y="883593"/>
+            <a:ext cx="8102798" cy="281880"/>
+          </a:xfrm>
+          <a:prstGeom prst="rect">
+            <a:avLst/>
+          </a:prstGeom>
+          <a:noFill/>
+          <a:ln/>
+        </p:spPr>
+        <p:txBody>
+          <a:bodyPr wrap="square" lIns="0" tIns="0" rIns="0" bIns="0" rtlCol="0" anchor="t"/>
+          <a:lstStyle/>
+          <a:p>
+            <a:pPr algn="l" marL="342900" indent="-342900">
+              <a:lnSpc>
+                <a:spcPts val="1620"/>
+              </a:lnSpc>
+              <a:spcAft>
+                <a:spcPts val="300"/>
+              </a:spcAft>
+              <a:buSzPct val="100000"/>
+              <a:buChar char="•"/>
+            </a:pPr>
+            <a:r>
+              <a:rPr lang="en-US" sz="1200" dirty="0">
+                <a:solidFill>
+                  <a:srgbClr val="1C2833"/>
+                </a:solidFill>
+                <a:latin typeface="Arial" pitchFamily="34" charset="0"/>
+                <a:ea typeface="Arial" pitchFamily="34" charset="-122"/>
+                <a:cs typeface="Arial" pitchFamily="34" charset="-120"/>
+              </a:rPr>
+              <a:t>Preview Day 5: </a:t>
+            </a:r>
+            <a:pPr algn="l" indent="0" marL="0">
+              <a:lnSpc>
+                <a:spcPts val="1620"/>
+              </a:lnSpc>
+              <a:spcAft>
+                <a:spcPts val="300"/>
+              </a:spcAft>
+              <a:buNone/>
+            </a:pPr>
+            <a:r>
               <a:rPr lang="en-US" sz="1200" i="1" dirty="0">
                 <a:solidFill>
                   <a:srgbClr val="1C2833"/>
@@ -2919,8 +4507,33 @@
                 <a:ea typeface="Arial" pitchFamily="34" charset="-122"/>
                 <a:cs typeface="Arial" pitchFamily="34" charset="-120"/>
               </a:rPr>
-              <a:t>The First Great Political Realist: Kautilya and His Arthashastra</a:t>
-            </a:r>
+              <a:t>"Tomorrow — mid-module quiz on everything we've covered so far."</a:t>
+            </a:r>
+            <a:endParaRPr lang="en-US" sz="1200" dirty="0"/>
+          </a:p>
+        </p:txBody>
+      </p:sp>
+      <p:sp>
+        <p:nvSpPr>
+          <p:cNvPr id="5" name="Text 3"/>
+          <p:cNvSpPr/>
+          <p:nvPr/>
+        </p:nvSpPr>
+        <p:spPr>
+          <a:xfrm>
+            <a:off x="406301" y="4434929"/>
+            <a:ext cx="8498026" cy="213271"/>
+          </a:xfrm>
+          <a:prstGeom prst="rect">
+            <a:avLst/>
+          </a:prstGeom>
+          <a:noFill/>
+          <a:ln/>
+        </p:spPr>
+        <p:txBody>
+          <a:bodyPr wrap="square" lIns="0" tIns="0" rIns="0" bIns="0" rtlCol="0" anchor="t"/>
+          <a:lstStyle/>
+          <a:p>
             <a:pPr algn="l" indent="0" marL="0">
               <a:lnSpc>
                 <a:spcPts val="1680"/>
@@ -2942,8 +4555,386 @@
                 <a:ea typeface="Arial" pitchFamily="34" charset="-122"/>
                 <a:cs typeface="Arial" pitchFamily="34" charset="-120"/>
               </a:rPr>
-              <a:t>. Lexington. – Bharata, </a:t>
-            </a:r>
+              <a:t>Middle ·  · IKS Curriculum</a:t>
+            </a:r>
+            <a:endParaRPr lang="en-US" sz="1200" dirty="0"/>
+          </a:p>
+        </p:txBody>
+      </p:sp>
+    </p:spTree>
+  </p:cSld>
+  <p:clrMapOvr>
+    <a:masterClrMapping/>
+  </p:clrMapOvr>
+</p:sld>
+</file>
+
+<file path=ppt/slides/slide16.xml><?xml version="1.0" encoding="utf-8"?>
+<p:sld xmlns:a="http://schemas.openxmlformats.org/drawingml/2006/main" xmlns:r="http://schemas.openxmlformats.org/officeDocument/2006/relationships" xmlns:p="http://schemas.openxmlformats.org/presentationml/2006/main">
+  <p:cSld name="Slide 16">
+    <p:bg>
+      <p:bgPr>
+        <a:solidFill>
+          <a:srgbClr val="FFFFFF"/>
+        </a:solidFill>
+      </p:bgPr>
+    </p:bg>
+    <p:spTree>
+      <p:nvGrpSpPr>
+        <p:cNvPr id="1" name=""/>
+        <p:cNvGrpSpPr/>
+        <p:nvPr/>
+      </p:nvGrpSpPr>
+      <p:grpSpPr>
+        <a:xfrm>
+          <a:off x="0" y="0"/>
+          <a:ext cx="0" cy="0"/>
+          <a:chOff x="0" y="0"/>
+          <a:chExt cx="0" cy="0"/>
+        </a:xfrm>
+      </p:grpSpPr>
+      <p:sp>
+        <p:nvSpPr>
+          <p:cNvPr id="2" name="Text 0"/>
+          <p:cNvSpPr/>
+          <p:nvPr/>
+        </p:nvSpPr>
+        <p:spPr>
+          <a:xfrm>
+            <a:off x="0" y="0"/>
+            <a:ext cx="9144000" cy="101501"/>
+          </a:xfrm>
+          <a:prstGeom prst="rect">
+            <a:avLst/>
+          </a:prstGeom>
+          <a:solidFill>
+            <a:srgbClr val="277884"/>
+          </a:solidFill>
+          <a:ln/>
+        </p:spPr>
+        <p:txBody>
+          <a:bodyPr wrap="square" rtlCol="0" anchor="ctr"/>
+          <a:lstStyle/>
+          <a:p>
+            <a:pPr indent="0" marL="0">
+              <a:buNone/>
+            </a:pPr>
+            <a:endParaRPr lang="en-US" dirty="0"/>
+          </a:p>
+        </p:txBody>
+      </p:sp>
+      <p:sp>
+        <p:nvSpPr>
+          <p:cNvPr id="3" name="Text 1"/>
+          <p:cNvSpPr/>
+          <p:nvPr/>
+        </p:nvSpPr>
+        <p:spPr>
+          <a:xfrm>
+            <a:off x="406301" y="457051"/>
+            <a:ext cx="8498026" cy="274290"/>
+          </a:xfrm>
+          <a:prstGeom prst="rect">
+            <a:avLst/>
+          </a:prstGeom>
+          <a:noFill/>
+          <a:ln/>
+        </p:spPr>
+        <p:txBody>
+          <a:bodyPr wrap="square" lIns="0" tIns="0" rIns="0" bIns="0" rtlCol="0" anchor="t"/>
+          <a:lstStyle/>
+          <a:p>
+            <a:pPr algn="l" indent="0" marL="0">
+              <a:lnSpc>
+                <a:spcPts val="2160"/>
+              </a:lnSpc>
+              <a:spcBef>
+                <a:spcPts val="600"/>
+              </a:spcBef>
+              <a:spcAft>
+                <a:spcPts val="800"/>
+              </a:spcAft>
+              <a:buNone/>
+            </a:pPr>
+            <a:r>
+              <a:rPr lang="en-US" sz="1800" b="1" dirty="0">
+                <a:solidFill>
+                  <a:srgbClr val="FE4447"/>
+                </a:solidFill>
+                <a:latin typeface="Georgia" pitchFamily="34" charset="0"/>
+                <a:ea typeface="Georgia" pitchFamily="34" charset="-122"/>
+                <a:cs typeface="Georgia" pitchFamily="34" charset="-120"/>
+              </a:rPr>
+              <a:t>Student-facing content</a:t>
+            </a:r>
+            <a:endParaRPr lang="en-US" sz="1800" dirty="0"/>
+          </a:p>
+        </p:txBody>
+      </p:sp>
+      <p:sp>
+        <p:nvSpPr>
+          <p:cNvPr id="4" name="Text 2"/>
+          <p:cNvSpPr/>
+          <p:nvPr/>
+        </p:nvSpPr>
+        <p:spPr>
+          <a:xfrm>
+            <a:off x="406301" y="883593"/>
+            <a:ext cx="8331398" cy="1612106"/>
+          </a:xfrm>
+          <a:prstGeom prst="rect">
+            <a:avLst/>
+          </a:prstGeom>
+          <a:solidFill>
+            <a:srgbClr val="F4F8F9"/>
+          </a:solidFill>
+          <a:ln/>
+        </p:spPr>
+        <p:txBody>
+          <a:bodyPr wrap="square" rtlCol="0" anchor="ctr"/>
+          <a:lstStyle/>
+          <a:p>
+            <a:pPr indent="0" marL="0">
+              <a:buNone/>
+            </a:pPr>
+            <a:endParaRPr lang="en-US" dirty="0"/>
+          </a:p>
+        </p:txBody>
+      </p:sp>
+      <p:sp>
+        <p:nvSpPr>
+          <p:cNvPr id="5" name="Shape 3"/>
+          <p:cNvSpPr/>
+          <p:nvPr/>
+        </p:nvSpPr>
+        <p:spPr>
+          <a:xfrm>
+            <a:off x="434876" y="883593"/>
+            <a:ext cx="0" cy="1612106"/>
+          </a:xfrm>
+          <a:prstGeom prst="line">
+            <a:avLst/>
+          </a:prstGeom>
+          <a:noFill/>
+          <a:ln w="57150">
+            <a:solidFill>
+              <a:srgbClr val="FE4447"/>
+            </a:solidFill>
+            <a:prstDash val="solid"/>
+          </a:ln>
+        </p:spPr>
+      </p:sp>
+      <p:sp>
+        <p:nvSpPr>
+          <p:cNvPr id="6" name="Text 4"/>
+          <p:cNvSpPr/>
+          <p:nvPr/>
+        </p:nvSpPr>
+        <p:spPr>
+          <a:xfrm>
+            <a:off x="692051" y="1074093"/>
+            <a:ext cx="7973389" cy="230981"/>
+          </a:xfrm>
+          <a:prstGeom prst="rect">
+            <a:avLst/>
+          </a:prstGeom>
+          <a:noFill/>
+          <a:ln/>
+        </p:spPr>
+        <p:txBody>
+          <a:bodyPr wrap="square" lIns="0" tIns="0" rIns="0" bIns="0" rtlCol="0" anchor="t"/>
+          <a:lstStyle/>
+          <a:p>
+            <a:pPr algn="l" indent="0" marL="0">
+              <a:lnSpc>
+                <a:spcPts val="1820"/>
+              </a:lnSpc>
+              <a:spcBef>
+                <a:spcPts val="300"/>
+              </a:spcBef>
+              <a:spcAft>
+                <a:spcPts val="300"/>
+              </a:spcAft>
+              <a:buNone/>
+            </a:pPr>
+            <a:r>
+              <a:rPr lang="en-US" sz="1300" b="1" i="1" dirty="0">
+                <a:solidFill>
+                  <a:srgbClr val="1C2833"/>
+                </a:solidFill>
+                <a:latin typeface="Georgia" pitchFamily="34" charset="0"/>
+                <a:ea typeface="Georgia" pitchFamily="34" charset="-122"/>
+                <a:cs typeface="Georgia" pitchFamily="34" charset="-120"/>
+              </a:rPr>
+              <a:t>The Four Upavedas — the APPLIED sciences</a:t>
+            </a:r>
+            <a:endParaRPr lang="en-US" sz="1300" dirty="0"/>
+          </a:p>
+        </p:txBody>
+      </p:sp>
+      <p:sp>
+        <p:nvSpPr>
+          <p:cNvPr id="7" name="Text 5"/>
+          <p:cNvSpPr/>
+          <p:nvPr/>
+        </p:nvSpPr>
+        <p:spPr>
+          <a:xfrm>
+            <a:off x="692051" y="1343174"/>
+            <a:ext cx="7973389" cy="461963"/>
+          </a:xfrm>
+          <a:prstGeom prst="rect">
+            <a:avLst/>
+          </a:prstGeom>
+          <a:noFill/>
+          <a:ln/>
+        </p:spPr>
+        <p:txBody>
+          <a:bodyPr wrap="square" lIns="0" tIns="0" rIns="0" bIns="0" rtlCol="0" anchor="t"/>
+          <a:lstStyle/>
+          <a:p>
+            <a:pPr algn="l" indent="0" marL="0">
+              <a:lnSpc>
+                <a:spcPts val="1820"/>
+              </a:lnSpc>
+              <a:spcBef>
+                <a:spcPts val="300"/>
+              </a:spcBef>
+              <a:spcAft>
+                <a:spcPts val="300"/>
+              </a:spcAft>
+              <a:buNone/>
+            </a:pPr>
+            <a:r>
+              <a:rPr lang="en-US" sz="1300" i="1" dirty="0">
+                <a:solidFill>
+                  <a:srgbClr val="1C2833"/>
+                </a:solidFill>
+                <a:latin typeface="Georgia" pitchFamily="34" charset="0"/>
+                <a:ea typeface="Georgia" pitchFamily="34" charset="-122"/>
+                <a:cs typeface="Georgia" pitchFamily="34" charset="-120"/>
+              </a:rPr>
+              <a:t>| # | Sanskrit | Domain | |---|----------|--------| | 1 | Āyurveda | Medicine | | 2 | Dhanurveda | Martial arts | | 3 | Gandharvaveda | Music | | 4 | Arthaśāstra | Governance &amp; economics |</a:t>
+            </a:r>
+            <a:endParaRPr lang="en-US" sz="1300" dirty="0"/>
+          </a:p>
+        </p:txBody>
+      </p:sp>
+      <p:sp>
+        <p:nvSpPr>
+          <p:cNvPr id="8" name="Text 6"/>
+          <p:cNvSpPr/>
+          <p:nvPr/>
+        </p:nvSpPr>
+        <p:spPr>
+          <a:xfrm>
+            <a:off x="692051" y="1843236"/>
+            <a:ext cx="7973389" cy="461963"/>
+          </a:xfrm>
+          <a:prstGeom prst="rect">
+            <a:avLst/>
+          </a:prstGeom>
+          <a:noFill/>
+          <a:ln/>
+        </p:spPr>
+        <p:txBody>
+          <a:bodyPr wrap="square" lIns="0" tIns="0" rIns="0" bIns="0" rtlCol="0" anchor="t"/>
+          <a:lstStyle/>
+          <a:p>
+            <a:pPr algn="l" indent="0" marL="0">
+              <a:lnSpc>
+                <a:spcPts val="1820"/>
+              </a:lnSpc>
+              <a:spcBef>
+                <a:spcPts val="300"/>
+              </a:spcBef>
+              <a:spcAft>
+                <a:spcPts val="300"/>
+              </a:spcAft>
+              <a:buNone/>
+            </a:pPr>
+            <a:r>
+              <a:rPr lang="en-US" sz="1300" dirty="0">
+                <a:solidFill>
+                  <a:srgbClr val="1C2833"/>
+                </a:solidFill>
+                <a:latin typeface="Georgia" pitchFamily="34" charset="0"/>
+                <a:ea typeface="Georgia" pitchFamily="34" charset="-122"/>
+                <a:cs typeface="Georgia" pitchFamily="34" charset="-120"/>
+              </a:rPr>
+              <a:t>Standout achievement: </a:t>
+            </a:r>
+            <a:pPr algn="l" indent="0" marL="0">
+              <a:lnSpc>
+                <a:spcPts val="1820"/>
+              </a:lnSpc>
+              <a:spcBef>
+                <a:spcPts val="300"/>
+              </a:spcBef>
+              <a:spcAft>
+                <a:spcPts val="300"/>
+              </a:spcAft>
+              <a:buNone/>
+            </a:pPr>
+            <a:r>
+              <a:rPr lang="en-US" sz="1300" b="1" i="1" dirty="0">
+                <a:solidFill>
+                  <a:srgbClr val="1C2833"/>
+                </a:solidFill>
+                <a:latin typeface="Georgia" pitchFamily="34" charset="0"/>
+                <a:ea typeface="Georgia" pitchFamily="34" charset="-122"/>
+                <a:cs typeface="Georgia" pitchFamily="34" charset="-120"/>
+              </a:rPr>
+              <a:t>Suśruta's surgical procedures</a:t>
+            </a:r>
+            <a:pPr algn="l" indent="0" marL="0">
+              <a:lnSpc>
+                <a:spcPts val="1820"/>
+              </a:lnSpc>
+              <a:spcBef>
+                <a:spcPts val="300"/>
+              </a:spcBef>
+              <a:spcAft>
+                <a:spcPts val="300"/>
+              </a:spcAft>
+              <a:buNone/>
+            </a:pPr>
+            <a:r>
+              <a:rPr lang="en-US" sz="1300" dirty="0">
+                <a:solidFill>
+                  <a:srgbClr val="1C2833"/>
+                </a:solidFill>
+                <a:latin typeface="Georgia" pitchFamily="34" charset="0"/>
+                <a:ea typeface="Georgia" pitchFamily="34" charset="-122"/>
+                <a:cs typeface="Georgia" pitchFamily="34" charset="-120"/>
+              </a:rPr>
+              <a:t> (~6th c. BCE), including cataract surgery and nose reconstruction.</a:t>
+            </a:r>
+            <a:endParaRPr lang="en-US" sz="1300" dirty="0"/>
+          </a:p>
+        </p:txBody>
+      </p:sp>
+      <p:sp>
+        <p:nvSpPr>
+          <p:cNvPr id="9" name="Text 7"/>
+          <p:cNvSpPr/>
+          <p:nvPr/>
+        </p:nvSpPr>
+        <p:spPr>
+          <a:xfrm>
+            <a:off x="406301" y="4434929"/>
+            <a:ext cx="8498026" cy="213271"/>
+          </a:xfrm>
+          <a:prstGeom prst="rect">
+            <a:avLst/>
+          </a:prstGeom>
+          <a:noFill/>
+          <a:ln/>
+        </p:spPr>
+        <p:txBody>
+          <a:bodyPr wrap="square" lIns="0" tIns="0" rIns="0" bIns="0" rtlCol="0" anchor="t"/>
+          <a:lstStyle/>
+          <a:p>
             <a:pPr algn="l" indent="0" marL="0">
               <a:lnSpc>
                 <a:spcPts val="1680"/>
@@ -2957,6 +4948,406 @@
               <a:buNone/>
             </a:pPr>
             <a:r>
+              <a:rPr lang="en-US" sz="1200" dirty="0">
+                <a:solidFill>
+                  <a:srgbClr val="1C2833"/>
+                </a:solidFill>
+                <a:latin typeface="Arial" pitchFamily="34" charset="0"/>
+                <a:ea typeface="Arial" pitchFamily="34" charset="-122"/>
+                <a:cs typeface="Arial" pitchFamily="34" charset="-120"/>
+              </a:rPr>
+              <a:t>Middle ·  · IKS Curriculum</a:t>
+            </a:r>
+            <a:endParaRPr lang="en-US" sz="1200" dirty="0"/>
+          </a:p>
+        </p:txBody>
+      </p:sp>
+    </p:spTree>
+  </p:cSld>
+  <p:clrMapOvr>
+    <a:masterClrMapping/>
+  </p:clrMapOvr>
+</p:sld>
+</file>
+
+<file path=ppt/slides/slide17.xml><?xml version="1.0" encoding="utf-8"?>
+<p:sld xmlns:a="http://schemas.openxmlformats.org/drawingml/2006/main" xmlns:r="http://schemas.openxmlformats.org/officeDocument/2006/relationships" xmlns:p="http://schemas.openxmlformats.org/presentationml/2006/main">
+  <p:cSld name="Slide 17">
+    <p:bg>
+      <p:bgPr>
+        <a:solidFill>
+          <a:srgbClr val="FFFFFF"/>
+        </a:solidFill>
+      </p:bgPr>
+    </p:bg>
+    <p:spTree>
+      <p:nvGrpSpPr>
+        <p:cNvPr id="1" name=""/>
+        <p:cNvGrpSpPr/>
+        <p:nvPr/>
+      </p:nvGrpSpPr>
+      <p:grpSpPr>
+        <a:xfrm>
+          <a:off x="0" y="0"/>
+          <a:ext cx="0" cy="0"/>
+          <a:chOff x="0" y="0"/>
+          <a:chExt cx="0" cy="0"/>
+        </a:xfrm>
+      </p:grpSpPr>
+      <p:sp>
+        <p:nvSpPr>
+          <p:cNvPr id="2" name="Text 0"/>
+          <p:cNvSpPr/>
+          <p:nvPr/>
+        </p:nvSpPr>
+        <p:spPr>
+          <a:xfrm>
+            <a:off x="0" y="0"/>
+            <a:ext cx="9144000" cy="101501"/>
+          </a:xfrm>
+          <a:prstGeom prst="rect">
+            <a:avLst/>
+          </a:prstGeom>
+          <a:solidFill>
+            <a:srgbClr val="277884"/>
+          </a:solidFill>
+          <a:ln/>
+        </p:spPr>
+        <p:txBody>
+          <a:bodyPr wrap="square" rtlCol="0" anchor="ctr"/>
+          <a:lstStyle/>
+          <a:p>
+            <a:pPr indent="0" marL="0">
+              <a:buNone/>
+            </a:pPr>
+            <a:endParaRPr lang="en-US" dirty="0"/>
+          </a:p>
+        </p:txBody>
+      </p:sp>
+      <p:sp>
+        <p:nvSpPr>
+          <p:cNvPr id="3" name="Text 1"/>
+          <p:cNvSpPr/>
+          <p:nvPr/>
+        </p:nvSpPr>
+        <p:spPr>
+          <a:xfrm>
+            <a:off x="406301" y="457051"/>
+            <a:ext cx="8498026" cy="274290"/>
+          </a:xfrm>
+          <a:prstGeom prst="rect">
+            <a:avLst/>
+          </a:prstGeom>
+          <a:noFill/>
+          <a:ln/>
+        </p:spPr>
+        <p:txBody>
+          <a:bodyPr wrap="square" lIns="0" tIns="0" rIns="0" bIns="0" rtlCol="0" anchor="t"/>
+          <a:lstStyle/>
+          <a:p>
+            <a:pPr algn="l" indent="0" marL="0">
+              <a:lnSpc>
+                <a:spcPts val="2160"/>
+              </a:lnSpc>
+              <a:spcBef>
+                <a:spcPts val="600"/>
+              </a:spcBef>
+              <a:spcAft>
+                <a:spcPts val="800"/>
+              </a:spcAft>
+              <a:buNone/>
+            </a:pPr>
+            <a:r>
+              <a:rPr lang="en-US" sz="1800" b="1" dirty="0">
+                <a:solidFill>
+                  <a:srgbClr val="FE4447"/>
+                </a:solidFill>
+                <a:latin typeface="Georgia" pitchFamily="34" charset="0"/>
+                <a:ea typeface="Georgia" pitchFamily="34" charset="-122"/>
+                <a:cs typeface="Georgia" pitchFamily="34" charset="-120"/>
+              </a:rPr>
+              <a:t>Homework</a:t>
+            </a:r>
+            <a:endParaRPr lang="en-US" sz="1800" dirty="0"/>
+          </a:p>
+        </p:txBody>
+      </p:sp>
+      <p:sp>
+        <p:nvSpPr>
+          <p:cNvPr id="4" name="Text 2"/>
+          <p:cNvSpPr/>
+          <p:nvPr/>
+        </p:nvSpPr>
+        <p:spPr>
+          <a:xfrm>
+            <a:off x="634901" y="883593"/>
+            <a:ext cx="8102798" cy="487561"/>
+          </a:xfrm>
+          <a:prstGeom prst="rect">
+            <a:avLst/>
+          </a:prstGeom>
+          <a:noFill/>
+          <a:ln/>
+        </p:spPr>
+        <p:txBody>
+          <a:bodyPr wrap="square" lIns="0" tIns="0" rIns="0" bIns="0" rtlCol="0" anchor="t"/>
+          <a:lstStyle/>
+          <a:p>
+            <a:pPr algn="l" marL="342900" indent="-342900">
+              <a:lnSpc>
+                <a:spcPts val="1620"/>
+              </a:lnSpc>
+              <a:spcAft>
+                <a:spcPts val="300"/>
+              </a:spcAft>
+              <a:buSzPct val="100000"/>
+              <a:buChar char="•"/>
+            </a:pPr>
+            <a:r>
+              <a:rPr lang="en-US" sz="1200" dirty="0">
+                <a:solidFill>
+                  <a:srgbClr val="1C2833"/>
+                </a:solidFill>
+                <a:latin typeface="Arial" pitchFamily="34" charset="0"/>
+                <a:ea typeface="Arial" pitchFamily="34" charset="-122"/>
+                <a:cs typeface="Arial" pitchFamily="34" charset="-120"/>
+              </a:rPr>
+              <a:t>Look up "Kauṭilya's Arthaśāstra" online. Find ONE specific governance idea it contains (e.g. spy networks, foreign-policy doctrine, tax classifications). Bring tomorrow.</a:t>
+            </a:r>
+            <a:endParaRPr lang="en-US" sz="1200" dirty="0"/>
+          </a:p>
+        </p:txBody>
+      </p:sp>
+      <p:sp>
+        <p:nvSpPr>
+          <p:cNvPr id="5" name="Text 3"/>
+          <p:cNvSpPr/>
+          <p:nvPr/>
+        </p:nvSpPr>
+        <p:spPr>
+          <a:xfrm>
+            <a:off x="406301" y="4434929"/>
+            <a:ext cx="8498026" cy="213271"/>
+          </a:xfrm>
+          <a:prstGeom prst="rect">
+            <a:avLst/>
+          </a:prstGeom>
+          <a:noFill/>
+          <a:ln/>
+        </p:spPr>
+        <p:txBody>
+          <a:bodyPr wrap="square" lIns="0" tIns="0" rIns="0" bIns="0" rtlCol="0" anchor="t"/>
+          <a:lstStyle/>
+          <a:p>
+            <a:pPr algn="l" indent="0" marL="0">
+              <a:lnSpc>
+                <a:spcPts val="1680"/>
+              </a:lnSpc>
+              <a:spcBef>
+                <a:spcPts val="300"/>
+              </a:spcBef>
+              <a:spcAft>
+                <a:spcPts val="300"/>
+              </a:spcAft>
+              <a:buNone/>
+            </a:pPr>
+            <a:r>
+              <a:rPr lang="en-US" sz="1200" dirty="0">
+                <a:solidFill>
+                  <a:srgbClr val="1C2833"/>
+                </a:solidFill>
+                <a:latin typeface="Arial" pitchFamily="34" charset="0"/>
+                <a:ea typeface="Arial" pitchFamily="34" charset="-122"/>
+                <a:cs typeface="Arial" pitchFamily="34" charset="-120"/>
+              </a:rPr>
+              <a:t>Middle ·  · IKS Curriculum</a:t>
+            </a:r>
+            <a:endParaRPr lang="en-US" sz="1200" dirty="0"/>
+          </a:p>
+        </p:txBody>
+      </p:sp>
+    </p:spTree>
+  </p:cSld>
+  <p:clrMapOvr>
+    <a:masterClrMapping/>
+  </p:clrMapOvr>
+</p:sld>
+</file>
+
+<file path=ppt/slides/slide18.xml><?xml version="1.0" encoding="utf-8"?>
+<p:sld xmlns:a="http://schemas.openxmlformats.org/drawingml/2006/main" xmlns:r="http://schemas.openxmlformats.org/officeDocument/2006/relationships" xmlns:p="http://schemas.openxmlformats.org/presentationml/2006/main">
+  <p:cSld name="Slide 18">
+    <p:bg>
+      <p:bgPr>
+        <a:solidFill>
+          <a:srgbClr val="FFFFFF"/>
+        </a:solidFill>
+      </p:bgPr>
+    </p:bg>
+    <p:spTree>
+      <p:nvGrpSpPr>
+        <p:cNvPr id="1" name=""/>
+        <p:cNvGrpSpPr/>
+        <p:nvPr/>
+      </p:nvGrpSpPr>
+      <p:grpSpPr>
+        <a:xfrm>
+          <a:off x="0" y="0"/>
+          <a:ext cx="0" cy="0"/>
+          <a:chOff x="0" y="0"/>
+          <a:chExt cx="0" cy="0"/>
+        </a:xfrm>
+      </p:grpSpPr>
+      <p:sp>
+        <p:nvSpPr>
+          <p:cNvPr id="2" name="Text 0"/>
+          <p:cNvSpPr/>
+          <p:nvPr/>
+        </p:nvSpPr>
+        <p:spPr>
+          <a:xfrm>
+            <a:off x="0" y="0"/>
+            <a:ext cx="9144000" cy="101501"/>
+          </a:xfrm>
+          <a:prstGeom prst="rect">
+            <a:avLst/>
+          </a:prstGeom>
+          <a:solidFill>
+            <a:srgbClr val="277884"/>
+          </a:solidFill>
+          <a:ln/>
+        </p:spPr>
+        <p:txBody>
+          <a:bodyPr wrap="square" rtlCol="0" anchor="ctr"/>
+          <a:lstStyle/>
+          <a:p>
+            <a:pPr indent="0" marL="0">
+              <a:buNone/>
+            </a:pPr>
+            <a:endParaRPr lang="en-US" dirty="0"/>
+          </a:p>
+        </p:txBody>
+      </p:sp>
+      <p:sp>
+        <p:nvSpPr>
+          <p:cNvPr id="3" name="Text 1"/>
+          <p:cNvSpPr/>
+          <p:nvPr/>
+        </p:nvSpPr>
+        <p:spPr>
+          <a:xfrm>
+            <a:off x="406301" y="457051"/>
+            <a:ext cx="8498026" cy="274290"/>
+          </a:xfrm>
+          <a:prstGeom prst="rect">
+            <a:avLst/>
+          </a:prstGeom>
+          <a:noFill/>
+          <a:ln/>
+        </p:spPr>
+        <p:txBody>
+          <a:bodyPr wrap="square" lIns="0" tIns="0" rIns="0" bIns="0" rtlCol="0" anchor="t"/>
+          <a:lstStyle/>
+          <a:p>
+            <a:pPr algn="l" indent="0" marL="0">
+              <a:lnSpc>
+                <a:spcPts val="2160"/>
+              </a:lnSpc>
+              <a:spcBef>
+                <a:spcPts val="600"/>
+              </a:spcBef>
+              <a:spcAft>
+                <a:spcPts val="800"/>
+              </a:spcAft>
+              <a:buNone/>
+            </a:pPr>
+            <a:r>
+              <a:rPr lang="en-US" sz="1800" b="1" dirty="0">
+                <a:solidFill>
+                  <a:srgbClr val="FE4447"/>
+                </a:solidFill>
+                <a:latin typeface="Georgia" pitchFamily="34" charset="0"/>
+                <a:ea typeface="Georgia" pitchFamily="34" charset="-122"/>
+                <a:cs typeface="Georgia" pitchFamily="34" charset="-120"/>
+              </a:rPr>
+              <a:t>Differentiation</a:t>
+            </a:r>
+            <a:endParaRPr lang="en-US" sz="1800" dirty="0"/>
+          </a:p>
+        </p:txBody>
+      </p:sp>
+      <p:sp>
+        <p:nvSpPr>
+          <p:cNvPr id="4" name="Text 2"/>
+          <p:cNvSpPr/>
+          <p:nvPr/>
+        </p:nvSpPr>
+        <p:spPr>
+          <a:xfrm>
+            <a:off x="634901" y="883593"/>
+            <a:ext cx="8102798" cy="525661"/>
+          </a:xfrm>
+          <a:prstGeom prst="rect">
+            <a:avLst/>
+          </a:prstGeom>
+          <a:noFill/>
+          <a:ln/>
+        </p:spPr>
+        <p:txBody>
+          <a:bodyPr wrap="square" lIns="0" tIns="0" rIns="0" bIns="0" rtlCol="0" anchor="t"/>
+          <a:lstStyle/>
+          <a:p>
+            <a:pPr algn="l" marL="342900" indent="-342900">
+              <a:lnSpc>
+                <a:spcPts val="1620"/>
+              </a:lnSpc>
+              <a:spcAft>
+                <a:spcPts val="300"/>
+              </a:spcAft>
+              <a:buSzPct val="100000"/>
+              <a:buChar char="•"/>
+            </a:pPr>
+            <a:r>
+              <a:rPr lang="en-US" sz="1200" b="1" dirty="0">
+                <a:solidFill>
+                  <a:srgbClr val="1C2833"/>
+                </a:solidFill>
+                <a:latin typeface="Arial" pitchFamily="34" charset="0"/>
+                <a:ea typeface="Arial" pitchFamily="34" charset="-122"/>
+                <a:cs typeface="Arial" pitchFamily="34" charset="-120"/>
+              </a:rPr>
+              <a:t>Tier up:</a:t>
+            </a:r>
+            <a:pPr algn="l" indent="0" marL="0">
+              <a:lnSpc>
+                <a:spcPts val="1620"/>
+              </a:lnSpc>
+              <a:spcAft>
+                <a:spcPts val="300"/>
+              </a:spcAft>
+              <a:buNone/>
+            </a:pPr>
+            <a:r>
+              <a:rPr lang="en-US" sz="1200" dirty="0">
+                <a:solidFill>
+                  <a:srgbClr val="1C2833"/>
+                </a:solidFill>
+                <a:latin typeface="Arial" pitchFamily="34" charset="0"/>
+                <a:ea typeface="Arial" pitchFamily="34" charset="-122"/>
+                <a:cs typeface="Arial" pitchFamily="34" charset="-120"/>
+              </a:rPr>
+              <a:t> Read the first chapter of the </a:t>
+            </a:r>
+            <a:pPr algn="l" indent="0" marL="0">
+              <a:lnSpc>
+                <a:spcPts val="1620"/>
+              </a:lnSpc>
+              <a:spcAft>
+                <a:spcPts val="300"/>
+              </a:spcAft>
+              <a:buNone/>
+            </a:pPr>
+            <a:r>
               <a:rPr lang="en-US" sz="1200" i="1" dirty="0">
                 <a:solidFill>
                   <a:srgbClr val="1C2833"/>
@@ -2969,6 +5360,135 @@
             </a:r>
             <a:pPr algn="l" indent="0" marL="0">
               <a:lnSpc>
+                <a:spcPts val="1620"/>
+              </a:lnSpc>
+              <a:spcAft>
+                <a:spcPts val="300"/>
+              </a:spcAft>
+              <a:buNone/>
+            </a:pPr>
+            <a:r>
+              <a:rPr lang="en-US" sz="1200" dirty="0">
+                <a:solidFill>
+                  <a:srgbClr val="1C2833"/>
+                </a:solidFill>
+                <a:latin typeface="Arial" pitchFamily="34" charset="0"/>
+                <a:ea typeface="Arial" pitchFamily="34" charset="-122"/>
+                <a:cs typeface="Arial" pitchFamily="34" charset="-120"/>
+              </a:rPr>
+              <a:t> in translation. What does it claim is the </a:t>
+            </a:r>
+            <a:pPr algn="l" indent="0" marL="0">
+              <a:lnSpc>
+                <a:spcPts val="1620"/>
+              </a:lnSpc>
+              <a:spcAft>
+                <a:spcPts val="300"/>
+              </a:spcAft>
+              <a:buNone/>
+            </a:pPr>
+            <a:r>
+              <a:rPr lang="en-US" sz="1200" i="1" dirty="0">
+                <a:solidFill>
+                  <a:srgbClr val="1C2833"/>
+                </a:solidFill>
+                <a:latin typeface="Arial" pitchFamily="34" charset="0"/>
+                <a:ea typeface="Arial" pitchFamily="34" charset="-122"/>
+                <a:cs typeface="Arial" pitchFamily="34" charset="-120"/>
+              </a:rPr>
+              <a:t>origin</a:t>
+            </a:r>
+            <a:pPr algn="l" indent="0" marL="0">
+              <a:lnSpc>
+                <a:spcPts val="1620"/>
+              </a:lnSpc>
+              <a:spcAft>
+                <a:spcPts val="300"/>
+              </a:spcAft>
+              <a:buNone/>
+            </a:pPr>
+            <a:r>
+              <a:rPr lang="en-US" sz="1200" dirty="0">
+                <a:solidFill>
+                  <a:srgbClr val="1C2833"/>
+                </a:solidFill>
+                <a:latin typeface="Arial" pitchFamily="34" charset="0"/>
+                <a:ea typeface="Arial" pitchFamily="34" charset="-122"/>
+                <a:cs typeface="Arial" pitchFamily="34" charset="-120"/>
+              </a:rPr>
+              <a:t> of theatre?</a:t>
+            </a:r>
+            <a:endParaRPr lang="en-US" sz="1200" dirty="0"/>
+          </a:p>
+          <a:p>
+            <a:pPr algn="l" marL="342900" indent="-342900">
+              <a:lnSpc>
+                <a:spcPts val="1620"/>
+              </a:lnSpc>
+              <a:spcAft>
+                <a:spcPts val="300"/>
+              </a:spcAft>
+              <a:buSzPct val="100000"/>
+              <a:buChar char="•"/>
+            </a:pPr>
+            <a:r>
+              <a:rPr lang="en-US" sz="1200" b="1" dirty="0">
+                <a:solidFill>
+                  <a:srgbClr val="1C2833"/>
+                </a:solidFill>
+                <a:latin typeface="Arial" pitchFamily="34" charset="0"/>
+                <a:ea typeface="Arial" pitchFamily="34" charset="-122"/>
+                <a:cs typeface="Arial" pitchFamily="34" charset="-120"/>
+              </a:rPr>
+              <a:t>Tier down:</a:t>
+            </a:r>
+            <a:pPr algn="l" indent="0" marL="0">
+              <a:lnSpc>
+                <a:spcPts val="1620"/>
+              </a:lnSpc>
+              <a:spcAft>
+                <a:spcPts val="300"/>
+              </a:spcAft>
+              <a:buNone/>
+            </a:pPr>
+            <a:r>
+              <a:rPr lang="en-US" sz="1200" dirty="0">
+                <a:solidFill>
+                  <a:srgbClr val="1C2833"/>
+                </a:solidFill>
+                <a:latin typeface="Arial" pitchFamily="34" charset="0"/>
+                <a:ea typeface="Arial" pitchFamily="34" charset="-122"/>
+                <a:cs typeface="Arial" pitchFamily="34" charset="-120"/>
+              </a:rPr>
+              <a:t> Memorise just the four Upavedas with one-line domains.</a:t>
+            </a:r>
+            <a:endParaRPr lang="en-US" sz="1200" dirty="0"/>
+          </a:p>
+        </p:txBody>
+      </p:sp>
+      <p:sp>
+        <p:nvSpPr>
+          <p:cNvPr id="5" name="Text 3"/>
+          <p:cNvSpPr/>
+          <p:nvPr/>
+        </p:nvSpPr>
+        <p:spPr>
+          <a:xfrm>
+            <a:off x="406301" y="4434929"/>
+            <a:ext cx="8498026" cy="213271"/>
+          </a:xfrm>
+          <a:prstGeom prst="rect">
+            <a:avLst/>
+          </a:prstGeom>
+          <a:noFill/>
+          <a:ln/>
+        </p:spPr>
+        <p:txBody>
+          <a:bodyPr wrap="square" lIns="0" tIns="0" rIns="0" bIns="0" rtlCol="0" anchor="t"/>
+          <a:lstStyle/>
+          <a:p>
+            <a:pPr algn="l" indent="0" marL="0">
+              <a:lnSpc>
                 <a:spcPts val="1680"/>
               </a:lnSpc>
               <a:spcBef>
@@ -2988,7 +5508,187 @@
                 <a:ea typeface="Arial" pitchFamily="34" charset="-122"/>
                 <a:cs typeface="Arial" pitchFamily="34" charset="-120"/>
               </a:rPr>
-              <a:t> — various editions.</a:t>
+              <a:t>Middle ·  · IKS Curriculum</a:t>
+            </a:r>
+            <a:endParaRPr lang="en-US" sz="1200" dirty="0"/>
+          </a:p>
+        </p:txBody>
+      </p:sp>
+    </p:spTree>
+  </p:cSld>
+  <p:clrMapOvr>
+    <a:masterClrMapping/>
+  </p:clrMapOvr>
+</p:sld>
+</file>
+
+<file path=ppt/slides/slide19.xml><?xml version="1.0" encoding="utf-8"?>
+<p:sld xmlns:a="http://schemas.openxmlformats.org/drawingml/2006/main" xmlns:r="http://schemas.openxmlformats.org/officeDocument/2006/relationships" xmlns:p="http://schemas.openxmlformats.org/presentationml/2006/main">
+  <p:cSld name="Slide 19">
+    <p:bg>
+      <p:bgPr>
+        <a:solidFill>
+          <a:srgbClr val="FFFFFF"/>
+        </a:solidFill>
+      </p:bgPr>
+    </p:bg>
+    <p:spTree>
+      <p:nvGrpSpPr>
+        <p:cNvPr id="1" name=""/>
+        <p:cNvGrpSpPr/>
+        <p:nvPr/>
+      </p:nvGrpSpPr>
+      <p:grpSpPr>
+        <a:xfrm>
+          <a:off x="0" y="0"/>
+          <a:ext cx="0" cy="0"/>
+          <a:chOff x="0" y="0"/>
+          <a:chExt cx="0" cy="0"/>
+        </a:xfrm>
+      </p:grpSpPr>
+      <p:sp>
+        <p:nvSpPr>
+          <p:cNvPr id="2" name="Text 0"/>
+          <p:cNvSpPr/>
+          <p:nvPr/>
+        </p:nvSpPr>
+        <p:spPr>
+          <a:xfrm>
+            <a:off x="0" y="0"/>
+            <a:ext cx="9144000" cy="101501"/>
+          </a:xfrm>
+          <a:prstGeom prst="rect">
+            <a:avLst/>
+          </a:prstGeom>
+          <a:solidFill>
+            <a:srgbClr val="277884"/>
+          </a:solidFill>
+          <a:ln/>
+        </p:spPr>
+        <p:txBody>
+          <a:bodyPr wrap="square" rtlCol="0" anchor="ctr"/>
+          <a:lstStyle/>
+          <a:p>
+            <a:pPr indent="0" marL="0">
+              <a:buNone/>
+            </a:pPr>
+            <a:endParaRPr lang="en-US" dirty="0"/>
+          </a:p>
+        </p:txBody>
+      </p:sp>
+      <p:sp>
+        <p:nvSpPr>
+          <p:cNvPr id="3" name="Text 1"/>
+          <p:cNvSpPr/>
+          <p:nvPr/>
+        </p:nvSpPr>
+        <p:spPr>
+          <a:xfrm>
+            <a:off x="406301" y="457051"/>
+            <a:ext cx="8498026" cy="274290"/>
+          </a:xfrm>
+          <a:prstGeom prst="rect">
+            <a:avLst/>
+          </a:prstGeom>
+          <a:noFill/>
+          <a:ln/>
+        </p:spPr>
+        <p:txBody>
+          <a:bodyPr wrap="square" lIns="0" tIns="0" rIns="0" bIns="0" rtlCol="0" anchor="t"/>
+          <a:lstStyle/>
+          <a:p>
+            <a:pPr algn="l" indent="0" marL="0">
+              <a:lnSpc>
+                <a:spcPts val="2160"/>
+              </a:lnSpc>
+              <a:spcBef>
+                <a:spcPts val="600"/>
+              </a:spcBef>
+              <a:spcAft>
+                <a:spcPts val="800"/>
+              </a:spcAft>
+              <a:buNone/>
+            </a:pPr>
+            <a:r>
+              <a:rPr lang="en-US" sz="1800" b="1" dirty="0">
+                <a:solidFill>
+                  <a:srgbClr val="FE4447"/>
+                </a:solidFill>
+                <a:latin typeface="Georgia" pitchFamily="34" charset="0"/>
+                <a:ea typeface="Georgia" pitchFamily="34" charset="-122"/>
+                <a:cs typeface="Georgia" pitchFamily="34" charset="-120"/>
+              </a:rPr>
+              <a:t>Teacher notes</a:t>
+            </a:r>
+            <a:endParaRPr lang="en-US" sz="1800" dirty="0"/>
+          </a:p>
+        </p:txBody>
+      </p:sp>
+      <p:sp>
+        <p:nvSpPr>
+          <p:cNvPr id="4" name="Text 2"/>
+          <p:cNvSpPr/>
+          <p:nvPr/>
+        </p:nvSpPr>
+        <p:spPr>
+          <a:xfrm>
+            <a:off x="634901" y="883593"/>
+            <a:ext cx="8102798" cy="937022"/>
+          </a:xfrm>
+          <a:prstGeom prst="rect">
+            <a:avLst/>
+          </a:prstGeom>
+          <a:noFill/>
+          <a:ln/>
+        </p:spPr>
+        <p:txBody>
+          <a:bodyPr wrap="square" lIns="0" tIns="0" rIns="0" bIns="0" rtlCol="0" anchor="t"/>
+          <a:lstStyle/>
+          <a:p>
+            <a:pPr algn="l" marL="342900" indent="-342900">
+              <a:lnSpc>
+                <a:spcPts val="1620"/>
+              </a:lnSpc>
+              <a:spcAft>
+                <a:spcPts val="300"/>
+              </a:spcAft>
+              <a:buSzPct val="100000"/>
+              <a:buChar char="•"/>
+            </a:pPr>
+            <a:r>
+              <a:rPr lang="en-US" sz="1200" dirty="0">
+                <a:solidFill>
+                  <a:srgbClr val="1C2833"/>
+                </a:solidFill>
+                <a:latin typeface="Arial" pitchFamily="34" charset="0"/>
+                <a:ea typeface="Arial" pitchFamily="34" charset="-122"/>
+                <a:cs typeface="Arial" pitchFamily="34" charset="-120"/>
+              </a:rPr>
+              <a:t>The classification of Upavedas is somewhat traditional and not perfectly clean. Some sources include 5 (adding Sthāpatya-veda — architecture). Stick to 4 for clarity; mention the 5th briefly.</a:t>
+            </a:r>
+            <a:endParaRPr lang="en-US" sz="1200" dirty="0"/>
+          </a:p>
+          <a:p>
+            <a:pPr algn="l" marL="342900" indent="-342900">
+              <a:lnSpc>
+                <a:spcPts val="1620"/>
+              </a:lnSpc>
+              <a:spcAft>
+                <a:spcPts val="300"/>
+              </a:spcAft>
+              <a:buSzPct val="100000"/>
+              <a:buChar char="•"/>
+            </a:pPr>
+            <a:r>
+              <a:rPr lang="en-US" sz="1200" dirty="0">
+                <a:solidFill>
+                  <a:srgbClr val="1C2833"/>
+                </a:solidFill>
+                <a:latin typeface="Arial" pitchFamily="34" charset="0"/>
+                <a:ea typeface="Arial" pitchFamily="34" charset="-122"/>
+                <a:cs typeface="Arial" pitchFamily="34" charset="-120"/>
+              </a:rPr>
+              <a:t>The Sushruta-nose-reconstruction history is genuine; European surgeons did learn the technique via 18th-century Bengali practitioners. It's a documented case of pre-modern Indian medical knowledge influencing modern medicine.</a:t>
             </a:r>
             <a:endParaRPr lang="en-US" sz="1200" dirty="0"/>
           </a:p>
@@ -3146,7 +5846,7 @@
                 <a:ea typeface="Georgia" pitchFamily="34" charset="-122"/>
                 <a:cs typeface="Georgia" pitchFamily="34" charset="-120"/>
               </a:rPr>
-              <a:t>Materials</a:t>
+              <a:t>Learning objective</a:t>
             </a:r>
             <a:endParaRPr lang="en-US" sz="1800" dirty="0"/>
           </a:p>
@@ -3194,7 +5894,339 @@
                 <a:ea typeface="Arial" pitchFamily="34" charset="-122"/>
                 <a:cs typeface="Arial" pitchFamily="34" charset="-120"/>
               </a:rPr>
-              <a:t>– Whiteboard – Visual cards or images (a surgical instrument, a vīṇā, a martial pose, a manuscript)</a:t>
+              <a:t>Students name the four Upavedas and one specific contribution of each.</a:t>
+            </a:r>
+            <a:endParaRPr lang="en-US" sz="1200" dirty="0"/>
+          </a:p>
+        </p:txBody>
+      </p:sp>
+      <p:sp>
+        <p:nvSpPr>
+          <p:cNvPr id="5" name="Text 3"/>
+          <p:cNvSpPr/>
+          <p:nvPr/>
+        </p:nvSpPr>
+        <p:spPr>
+          <a:xfrm>
+            <a:off x="406301" y="4434929"/>
+            <a:ext cx="8498026" cy="213271"/>
+          </a:xfrm>
+          <a:prstGeom prst="rect">
+            <a:avLst/>
+          </a:prstGeom>
+          <a:noFill/>
+          <a:ln/>
+        </p:spPr>
+        <p:txBody>
+          <a:bodyPr wrap="square" lIns="0" tIns="0" rIns="0" bIns="0" rtlCol="0" anchor="t"/>
+          <a:lstStyle/>
+          <a:p>
+            <a:pPr algn="l" indent="0" marL="0">
+              <a:lnSpc>
+                <a:spcPts val="1680"/>
+              </a:lnSpc>
+              <a:spcBef>
+                <a:spcPts val="300"/>
+              </a:spcBef>
+              <a:spcAft>
+                <a:spcPts val="300"/>
+              </a:spcAft>
+              <a:buNone/>
+            </a:pPr>
+            <a:r>
+              <a:rPr lang="en-US" sz="1200" dirty="0">
+                <a:solidFill>
+                  <a:srgbClr val="1C2833"/>
+                </a:solidFill>
+                <a:latin typeface="Arial" pitchFamily="34" charset="0"/>
+                <a:ea typeface="Arial" pitchFamily="34" charset="-122"/>
+                <a:cs typeface="Arial" pitchFamily="34" charset="-120"/>
+              </a:rPr>
+              <a:t>Middle ·  · IKS Curriculum</a:t>
+            </a:r>
+            <a:endParaRPr lang="en-US" sz="1200" dirty="0"/>
+          </a:p>
+        </p:txBody>
+      </p:sp>
+    </p:spTree>
+  </p:cSld>
+  <p:clrMapOvr>
+    <a:masterClrMapping/>
+  </p:clrMapOvr>
+</p:sld>
+</file>
+
+<file path=ppt/slides/slide20.xml><?xml version="1.0" encoding="utf-8"?>
+<p:sld xmlns:a="http://schemas.openxmlformats.org/drawingml/2006/main" xmlns:r="http://schemas.openxmlformats.org/officeDocument/2006/relationships" xmlns:p="http://schemas.openxmlformats.org/presentationml/2006/main">
+  <p:cSld name="Slide 20">
+    <p:bg>
+      <p:bgPr>
+        <a:solidFill>
+          <a:srgbClr val="FFFFFF"/>
+        </a:solidFill>
+      </p:bgPr>
+    </p:bg>
+    <p:spTree>
+      <p:nvGrpSpPr>
+        <p:cNvPr id="1" name=""/>
+        <p:cNvGrpSpPr/>
+        <p:nvPr/>
+      </p:nvGrpSpPr>
+      <p:grpSpPr>
+        <a:xfrm>
+          <a:off x="0" y="0"/>
+          <a:ext cx="0" cy="0"/>
+          <a:chOff x="0" y="0"/>
+          <a:chExt cx="0" cy="0"/>
+        </a:xfrm>
+      </p:grpSpPr>
+      <p:sp>
+        <p:nvSpPr>
+          <p:cNvPr id="2" name="Text 0"/>
+          <p:cNvSpPr/>
+          <p:nvPr/>
+        </p:nvSpPr>
+        <p:spPr>
+          <a:xfrm>
+            <a:off x="0" y="0"/>
+            <a:ext cx="9144000" cy="101501"/>
+          </a:xfrm>
+          <a:prstGeom prst="rect">
+            <a:avLst/>
+          </a:prstGeom>
+          <a:solidFill>
+            <a:srgbClr val="277884"/>
+          </a:solidFill>
+          <a:ln/>
+        </p:spPr>
+        <p:txBody>
+          <a:bodyPr wrap="square" rtlCol="0" anchor="ctr"/>
+          <a:lstStyle/>
+          <a:p>
+            <a:pPr indent="0" marL="0">
+              <a:buNone/>
+            </a:pPr>
+            <a:endParaRPr lang="en-US" dirty="0"/>
+          </a:p>
+        </p:txBody>
+      </p:sp>
+      <p:sp>
+        <p:nvSpPr>
+          <p:cNvPr id="3" name="Text 1"/>
+          <p:cNvSpPr/>
+          <p:nvPr/>
+        </p:nvSpPr>
+        <p:spPr>
+          <a:xfrm>
+            <a:off x="406301" y="457051"/>
+            <a:ext cx="8498026" cy="274290"/>
+          </a:xfrm>
+          <a:prstGeom prst="rect">
+            <a:avLst/>
+          </a:prstGeom>
+          <a:noFill/>
+          <a:ln/>
+        </p:spPr>
+        <p:txBody>
+          <a:bodyPr wrap="square" lIns="0" tIns="0" rIns="0" bIns="0" rtlCol="0" anchor="t"/>
+          <a:lstStyle/>
+          <a:p>
+            <a:pPr algn="l" indent="0" marL="0">
+              <a:lnSpc>
+                <a:spcPts val="2160"/>
+              </a:lnSpc>
+              <a:spcBef>
+                <a:spcPts val="600"/>
+              </a:spcBef>
+              <a:spcAft>
+                <a:spcPts val="800"/>
+              </a:spcAft>
+              <a:buNone/>
+            </a:pPr>
+            <a:r>
+              <a:rPr lang="en-US" sz="1800" b="1" dirty="0">
+                <a:solidFill>
+                  <a:srgbClr val="FE4447"/>
+                </a:solidFill>
+                <a:latin typeface="Georgia" pitchFamily="34" charset="0"/>
+                <a:ea typeface="Georgia" pitchFamily="34" charset="-122"/>
+                <a:cs typeface="Georgia" pitchFamily="34" charset="-120"/>
+              </a:rPr>
+              <a:t>Citation(s) used</a:t>
+            </a:r>
+            <a:endParaRPr lang="en-US" sz="1800" dirty="0"/>
+          </a:p>
+        </p:txBody>
+      </p:sp>
+      <p:sp>
+        <p:nvSpPr>
+          <p:cNvPr id="4" name="Text 2"/>
+          <p:cNvSpPr/>
+          <p:nvPr/>
+        </p:nvSpPr>
+        <p:spPr>
+          <a:xfrm>
+            <a:off x="634901" y="883593"/>
+            <a:ext cx="8102798" cy="769441"/>
+          </a:xfrm>
+          <a:prstGeom prst="rect">
+            <a:avLst/>
+          </a:prstGeom>
+          <a:noFill/>
+          <a:ln/>
+        </p:spPr>
+        <p:txBody>
+          <a:bodyPr wrap="square" lIns="0" tIns="0" rIns="0" bIns="0" rtlCol="0" anchor="t"/>
+          <a:lstStyle/>
+          <a:p>
+            <a:pPr algn="l" marL="342900" indent="-342900">
+              <a:lnSpc>
+                <a:spcPts val="1620"/>
+              </a:lnSpc>
+              <a:spcAft>
+                <a:spcPts val="300"/>
+              </a:spcAft>
+              <a:buSzPct val="100000"/>
+              <a:buChar char="•"/>
+            </a:pPr>
+            <a:r>
+              <a:rPr lang="en-US" sz="1200" dirty="0">
+                <a:solidFill>
+                  <a:srgbClr val="1C2833"/>
+                </a:solidFill>
+                <a:latin typeface="Arial" pitchFamily="34" charset="0"/>
+                <a:ea typeface="Arial" pitchFamily="34" charset="-122"/>
+                <a:cs typeface="Arial" pitchFamily="34" charset="-120"/>
+              </a:rPr>
+              <a:t>Wujastyk (2003) on Caraka &amp; Suśruta.</a:t>
+            </a:r>
+            <a:endParaRPr lang="en-US" sz="1200" dirty="0"/>
+          </a:p>
+          <a:p>
+            <a:pPr algn="l" marL="342900" indent="-342900">
+              <a:lnSpc>
+                <a:spcPts val="1620"/>
+              </a:lnSpc>
+              <a:spcAft>
+                <a:spcPts val="300"/>
+              </a:spcAft>
+              <a:buSzPct val="100000"/>
+              <a:buChar char="•"/>
+            </a:pPr>
+            <a:r>
+              <a:rPr lang="en-US" sz="1200" dirty="0">
+                <a:solidFill>
+                  <a:srgbClr val="1C2833"/>
+                </a:solidFill>
+                <a:latin typeface="Arial" pitchFamily="34" charset="0"/>
+                <a:ea typeface="Arial" pitchFamily="34" charset="-122"/>
+                <a:cs typeface="Arial" pitchFamily="34" charset="-120"/>
+              </a:rPr>
+              <a:t>Boesche, R. (2003). </a:t>
+            </a:r>
+            <a:pPr algn="l" indent="0" marL="0">
+              <a:lnSpc>
+                <a:spcPts val="1620"/>
+              </a:lnSpc>
+              <a:spcAft>
+                <a:spcPts val="300"/>
+              </a:spcAft>
+              <a:buNone/>
+            </a:pPr>
+            <a:r>
+              <a:rPr lang="en-US" sz="1200" i="1" dirty="0">
+                <a:solidFill>
+                  <a:srgbClr val="1C2833"/>
+                </a:solidFill>
+                <a:latin typeface="Arial" pitchFamily="34" charset="0"/>
+                <a:ea typeface="Arial" pitchFamily="34" charset="-122"/>
+                <a:cs typeface="Arial" pitchFamily="34" charset="-120"/>
+              </a:rPr>
+              <a:t>The First Great Political Realist: Kautilya and His Arthashastra</a:t>
+            </a:r>
+            <a:pPr algn="l" indent="0" marL="0">
+              <a:lnSpc>
+                <a:spcPts val="1620"/>
+              </a:lnSpc>
+              <a:spcAft>
+                <a:spcPts val="300"/>
+              </a:spcAft>
+              <a:buNone/>
+            </a:pPr>
+            <a:r>
+              <a:rPr lang="en-US" sz="1200" dirty="0">
+                <a:solidFill>
+                  <a:srgbClr val="1C2833"/>
+                </a:solidFill>
+                <a:latin typeface="Arial" pitchFamily="34" charset="0"/>
+                <a:ea typeface="Arial" pitchFamily="34" charset="-122"/>
+                <a:cs typeface="Arial" pitchFamily="34" charset="-120"/>
+              </a:rPr>
+              <a:t>. Lexington.</a:t>
+            </a:r>
+            <a:endParaRPr lang="en-US" sz="1200" dirty="0"/>
+          </a:p>
+          <a:p>
+            <a:pPr algn="l" marL="342900" indent="-342900">
+              <a:lnSpc>
+                <a:spcPts val="1620"/>
+              </a:lnSpc>
+              <a:spcAft>
+                <a:spcPts val="300"/>
+              </a:spcAft>
+              <a:buSzPct val="100000"/>
+              <a:buChar char="•"/>
+            </a:pPr>
+            <a:r>
+              <a:rPr lang="en-US" sz="1200" dirty="0">
+                <a:solidFill>
+                  <a:srgbClr val="1C2833"/>
+                </a:solidFill>
+                <a:latin typeface="Arial" pitchFamily="34" charset="0"/>
+                <a:ea typeface="Arial" pitchFamily="34" charset="-122"/>
+                <a:cs typeface="Arial" pitchFamily="34" charset="-120"/>
+              </a:rPr>
+              <a:t>Bharata, </a:t>
+            </a:r>
+            <a:pPr algn="l" indent="0" marL="0">
+              <a:lnSpc>
+                <a:spcPts val="1620"/>
+              </a:lnSpc>
+              <a:spcAft>
+                <a:spcPts val="300"/>
+              </a:spcAft>
+              <a:buNone/>
+            </a:pPr>
+            <a:r>
+              <a:rPr lang="en-US" sz="1200" i="1" dirty="0">
+                <a:solidFill>
+                  <a:srgbClr val="1C2833"/>
+                </a:solidFill>
+                <a:latin typeface="Arial" pitchFamily="34" charset="0"/>
+                <a:ea typeface="Arial" pitchFamily="34" charset="-122"/>
+                <a:cs typeface="Arial" pitchFamily="34" charset="-120"/>
+              </a:rPr>
+              <a:t>Nāṭyaśāstra</a:t>
+            </a:r>
+            <a:pPr algn="l" indent="0" marL="0">
+              <a:lnSpc>
+                <a:spcPts val="1620"/>
+              </a:lnSpc>
+              <a:spcAft>
+                <a:spcPts val="300"/>
+              </a:spcAft>
+              <a:buNone/>
+            </a:pPr>
+            <a:r>
+              <a:rPr lang="en-US" sz="1200" dirty="0">
+                <a:solidFill>
+                  <a:srgbClr val="1C2833"/>
+                </a:solidFill>
+                <a:latin typeface="Arial" pitchFamily="34" charset="0"/>
+                <a:ea typeface="Arial" pitchFamily="34" charset="-122"/>
+                <a:cs typeface="Arial" pitchFamily="34" charset="-120"/>
+              </a:rPr>
+              <a:t> — various editions.</a:t>
             </a:r>
             <a:endParaRPr lang="en-US" sz="1200" dirty="0"/>
           </a:p>
@@ -3352,7 +6384,7 @@
                 <a:ea typeface="Georgia" pitchFamily="34" charset="-122"/>
                 <a:cs typeface="Georgia" pitchFamily="34" charset="-120"/>
               </a:rPr>
-              <a:t>Vocabulary</a:t>
+              <a:t>Materials</a:t>
             </a:r>
             <a:endParaRPr lang="en-US" sz="1800" dirty="0"/>
           </a:p>
@@ -3390,26 +6422,6 @@
               <a:buChar char="•"/>
             </a:pPr>
             <a:r>
-              <a:rPr lang="en-US" sz="1200" i="1" dirty="0">
-                <a:solidFill>
-                  <a:srgbClr val="1C2833"/>
-                </a:solidFill>
-                <a:latin typeface="Arial" pitchFamily="34" charset="0"/>
-                <a:ea typeface="Arial" pitchFamily="34" charset="-122"/>
-                <a:cs typeface="Arial" pitchFamily="34" charset="-120"/>
-              </a:rPr>
-              <a:t>Upaveda</a:t>
-            </a:r>
-            <a:pPr algn="l" indent="0" marL="0">
-              <a:lnSpc>
-                <a:spcPts val="1620"/>
-              </a:lnSpc>
-              <a:spcAft>
-                <a:spcPts val="300"/>
-              </a:spcAft>
-              <a:buNone/>
-            </a:pPr>
-            <a:r>
               <a:rPr lang="en-US" sz="1200" dirty="0">
                 <a:solidFill>
                   <a:srgbClr val="1C2833"/>
@@ -3418,7 +6430,7 @@
                 <a:ea typeface="Arial" pitchFamily="34" charset="-122"/>
                 <a:cs typeface="Arial" pitchFamily="34" charset="-120"/>
               </a:rPr>
-              <a:t> — "subordinate Veda"; applied sciences</a:t>
+              <a:t>Whiteboard</a:t>
             </a:r>
             <a:endParaRPr lang="en-US" sz="1200" dirty="0"/>
           </a:p>
@@ -3434,26 +6446,6 @@
               <a:buChar char="•"/>
             </a:pPr>
             <a:r>
-              <a:rPr lang="en-US" sz="1200" i="1" dirty="0">
-                <a:solidFill>
-                  <a:srgbClr val="1C2833"/>
-                </a:solidFill>
-                <a:latin typeface="Arial" pitchFamily="34" charset="0"/>
-                <a:ea typeface="Arial" pitchFamily="34" charset="-122"/>
-                <a:cs typeface="Arial" pitchFamily="34" charset="-120"/>
-              </a:rPr>
-              <a:t>cikitsā</a:t>
-            </a:r>
-            <a:pPr algn="l" indent="0" marL="0">
-              <a:lnSpc>
-                <a:spcPts val="1620"/>
-              </a:lnSpc>
-              <a:spcAft>
-                <a:spcPts val="300"/>
-              </a:spcAft>
-              <a:buNone/>
-            </a:pPr>
-            <a:r>
               <a:rPr lang="en-US" sz="1200" dirty="0">
                 <a:solidFill>
                   <a:srgbClr val="1C2833"/>
@@ -3462,7 +6454,7 @@
                 <a:ea typeface="Arial" pitchFamily="34" charset="-122"/>
                 <a:cs typeface="Arial" pitchFamily="34" charset="-120"/>
               </a:rPr>
-              <a:t> — "treatment, therapy"</a:t>
+              <a:t>Visual cards or images (a surgical instrument, a vīṇā, a martial pose, a manuscript)</a:t>
             </a:r>
             <a:endParaRPr lang="en-US" sz="1200" dirty="0"/>
           </a:p>
@@ -3620,7 +6612,7 @@
                 <a:ea typeface="Georgia" pitchFamily="34" charset="-122"/>
                 <a:cs typeface="Georgia" pitchFamily="34" charset="-120"/>
               </a:rPr>
-              <a:t>Flow</a:t>
+              <a:t>Vocabulary</a:t>
             </a:r>
             <a:endParaRPr lang="en-US" sz="1800" dirty="0"/>
           </a:p>
@@ -3629,6 +6621,116 @@
       <p:sp>
         <p:nvSpPr>
           <p:cNvPr id="4" name="Text 2"/>
+          <p:cNvSpPr/>
+          <p:nvPr/>
+        </p:nvSpPr>
+        <p:spPr>
+          <a:xfrm>
+            <a:off x="634901" y="883593"/>
+            <a:ext cx="8102798" cy="525661"/>
+          </a:xfrm>
+          <a:prstGeom prst="rect">
+            <a:avLst/>
+          </a:prstGeom>
+          <a:noFill/>
+          <a:ln/>
+        </p:spPr>
+        <p:txBody>
+          <a:bodyPr wrap="square" lIns="0" tIns="0" rIns="0" bIns="0" rtlCol="0" anchor="t"/>
+          <a:lstStyle/>
+          <a:p>
+            <a:pPr algn="l" marL="342900" indent="-342900">
+              <a:lnSpc>
+                <a:spcPts val="1620"/>
+              </a:lnSpc>
+              <a:spcAft>
+                <a:spcPts val="300"/>
+              </a:spcAft>
+              <a:buSzPct val="100000"/>
+              <a:buChar char="•"/>
+            </a:pPr>
+            <a:r>
+              <a:rPr lang="en-US" sz="1200" i="1" dirty="0">
+                <a:solidFill>
+                  <a:srgbClr val="1C2833"/>
+                </a:solidFill>
+                <a:latin typeface="Arial" pitchFamily="34" charset="0"/>
+                <a:ea typeface="Arial" pitchFamily="34" charset="-122"/>
+                <a:cs typeface="Arial" pitchFamily="34" charset="-120"/>
+              </a:rPr>
+              <a:t>Upaveda</a:t>
+            </a:r>
+            <a:pPr algn="l" indent="0" marL="0">
+              <a:lnSpc>
+                <a:spcPts val="1620"/>
+              </a:lnSpc>
+              <a:spcAft>
+                <a:spcPts val="300"/>
+              </a:spcAft>
+              <a:buNone/>
+            </a:pPr>
+            <a:r>
+              <a:rPr lang="en-US" sz="1200" dirty="0">
+                <a:solidFill>
+                  <a:srgbClr val="1C2833"/>
+                </a:solidFill>
+                <a:latin typeface="Arial" pitchFamily="34" charset="0"/>
+                <a:ea typeface="Arial" pitchFamily="34" charset="-122"/>
+                <a:cs typeface="Arial" pitchFamily="34" charset="-120"/>
+              </a:rPr>
+              <a:t> — "subordinate Veda"; applied sciences</a:t>
+            </a:r>
+            <a:endParaRPr lang="en-US" sz="1200" dirty="0"/>
+          </a:p>
+          <a:p>
+            <a:pPr algn="l" marL="342900" indent="-342900">
+              <a:lnSpc>
+                <a:spcPts val="1620"/>
+              </a:lnSpc>
+              <a:spcAft>
+                <a:spcPts val="300"/>
+              </a:spcAft>
+              <a:buSzPct val="100000"/>
+              <a:buChar char="•"/>
+            </a:pPr>
+            <a:r>
+              <a:rPr lang="en-US" sz="1200" i="1" dirty="0">
+                <a:solidFill>
+                  <a:srgbClr val="1C2833"/>
+                </a:solidFill>
+                <a:latin typeface="Arial" pitchFamily="34" charset="0"/>
+                <a:ea typeface="Arial" pitchFamily="34" charset="-122"/>
+                <a:cs typeface="Arial" pitchFamily="34" charset="-120"/>
+              </a:rPr>
+              <a:t>cikitsā</a:t>
+            </a:r>
+            <a:pPr algn="l" indent="0" marL="0">
+              <a:lnSpc>
+                <a:spcPts val="1620"/>
+              </a:lnSpc>
+              <a:spcAft>
+                <a:spcPts val="300"/>
+              </a:spcAft>
+              <a:buNone/>
+            </a:pPr>
+            <a:r>
+              <a:rPr lang="en-US" sz="1200" dirty="0">
+                <a:solidFill>
+                  <a:srgbClr val="1C2833"/>
+                </a:solidFill>
+                <a:latin typeface="Arial" pitchFamily="34" charset="0"/>
+                <a:ea typeface="Arial" pitchFamily="34" charset="-122"/>
+                <a:cs typeface="Arial" pitchFamily="34" charset="-120"/>
+              </a:rPr>
+              <a:t> — "treatment, therapy"</a:t>
+            </a:r>
+            <a:endParaRPr lang="en-US" sz="1200" dirty="0"/>
+          </a:p>
+        </p:txBody>
+      </p:sp>
+      <p:sp>
+        <p:nvSpPr>
+          <p:cNvPr id="5" name="Text 3"/>
           <p:cNvSpPr/>
           <p:nvPr/>
         </p:nvSpPr>
@@ -3778,7 +6880,7 @@
                 <a:ea typeface="Georgia" pitchFamily="34" charset="-122"/>
                 <a:cs typeface="Georgia" pitchFamily="34" charset="-120"/>
               </a:rPr>
-              <a:t>Warm-up (5 min)</a:t>
+              <a:t>Flow</a:t>
             </a:r>
             <a:endParaRPr lang="en-US" sz="1800" dirty="0"/>
           </a:p>
@@ -3787,54 +6889,6 @@
       <p:sp>
         <p:nvSpPr>
           <p:cNvPr id="4" name="Text 2"/>
-          <p:cNvSpPr/>
-          <p:nvPr/>
-        </p:nvSpPr>
-        <p:spPr>
-          <a:xfrm>
-            <a:off x="406301" y="870942"/>
-            <a:ext cx="8498026" cy="213271"/>
-          </a:xfrm>
-          <a:prstGeom prst="rect">
-            <a:avLst/>
-          </a:prstGeom>
-          <a:noFill/>
-          <a:ln/>
-        </p:spPr>
-        <p:txBody>
-          <a:bodyPr wrap="square" lIns="0" tIns="0" rIns="0" bIns="0" rtlCol="0" anchor="t"/>
-          <a:lstStyle/>
-          <a:p>
-            <a:pPr algn="l" indent="0" marL="0">
-              <a:lnSpc>
-                <a:spcPts val="1680"/>
-              </a:lnSpc>
-              <a:spcBef>
-                <a:spcPts val="300"/>
-              </a:spcBef>
-              <a:spcAft>
-                <a:spcPts val="300"/>
-              </a:spcAft>
-              <a:buNone/>
-            </a:pPr>
-            <a:r>
-              <a:rPr lang="en-US" sz="1200" dirty="0">
-                <a:solidFill>
-                  <a:srgbClr val="1C2833"/>
-                </a:solidFill>
-                <a:latin typeface="Arial" pitchFamily="34" charset="0"/>
-                <a:ea typeface="Arial" pitchFamily="34" charset="-122"/>
-                <a:cs typeface="Arial" pitchFamily="34" charset="-120"/>
-              </a:rPr>
-              <a:t>Daily prompt + recall: name 3 of the 6 Vedāṅgas.</a:t>
-            </a:r>
-            <a:endParaRPr lang="en-US" sz="1200" dirty="0"/>
-          </a:p>
-        </p:txBody>
-      </p:sp>
-      <p:sp>
-        <p:nvSpPr>
-          <p:cNvPr id="5" name="Text 3"/>
           <p:cNvSpPr/>
           <p:nvPr/>
         </p:nvSpPr>
@@ -3984,7 +7038,7 @@
                 <a:ea typeface="Georgia" pitchFamily="34" charset="-122"/>
                 <a:cs typeface="Georgia" pitchFamily="34" charset="-120"/>
               </a:rPr>
-              <a:t>Activity (15 min) — Match an Upaveda to a problem</a:t>
+              <a:t>Warm-up (5 min)</a:t>
             </a:r>
             <a:endParaRPr lang="en-US" sz="1800" dirty="0"/>
           </a:p>
@@ -4032,7 +7086,7 @@
                 <a:ea typeface="Arial" pitchFamily="34" charset="-122"/>
                 <a:cs typeface="Arial" pitchFamily="34" charset="-120"/>
               </a:rPr>
-              <a:t>Teacher gives 5 modern problems on the board. Students decide which Upaveda's tradition would have addressed each:</a:t>
+              <a:t>Daily prompt + recall: name 3 of the 6 Vedāṅgas.</a:t>
             </a:r>
             <a:endParaRPr lang="en-US" sz="1200" dirty="0"/>
           </a:p>
@@ -4041,196 +7095,6 @@
       <p:sp>
         <p:nvSpPr>
           <p:cNvPr id="5" name="Text 3"/>
-          <p:cNvSpPr/>
-          <p:nvPr/>
-        </p:nvSpPr>
-        <p:spPr>
-          <a:xfrm>
-            <a:off x="634901" y="1173063"/>
-            <a:ext cx="8102798" cy="1257002"/>
-          </a:xfrm>
-          <a:prstGeom prst="rect">
-            <a:avLst/>
-          </a:prstGeom>
-          <a:noFill/>
-          <a:ln/>
-        </p:spPr>
-        <p:txBody>
-          <a:bodyPr wrap="square" lIns="0" tIns="0" rIns="0" bIns="0" rtlCol="0" anchor="t"/>
-          <a:lstStyle/>
-          <a:p>
-            <a:pPr algn="l" marL="342900" indent="-342900">
-              <a:lnSpc>
-                <a:spcPts val="1620"/>
-              </a:lnSpc>
-              <a:spcAft>
-                <a:spcPts val="300"/>
-              </a:spcAft>
-              <a:buSzPct val="100000"/>
-              <a:buChar char="•"/>
-            </a:pPr>
-            <a:r>
-              <a:rPr lang="en-US" sz="1200" dirty="0">
-                <a:solidFill>
-                  <a:srgbClr val="1C2833"/>
-                </a:solidFill>
-                <a:latin typeface="Arial" pitchFamily="34" charset="0"/>
-                <a:ea typeface="Arial" pitchFamily="34" charset="-122"/>
-                <a:cs typeface="Arial" pitchFamily="34" charset="-120"/>
-              </a:rPr>
-              <a:t>"I have a chronic skin issue, what would the tradition suggest?" (Āyurveda)</a:t>
-            </a:r>
-            <a:endParaRPr lang="en-US" sz="1200" dirty="0"/>
-          </a:p>
-          <a:p>
-            <a:pPr algn="l" marL="342900" indent="-342900">
-              <a:lnSpc>
-                <a:spcPts val="1620"/>
-              </a:lnSpc>
-              <a:spcAft>
-                <a:spcPts val="300"/>
-              </a:spcAft>
-              <a:buSzPct val="100000"/>
-              <a:buChar char="•"/>
-            </a:pPr>
-            <a:r>
-              <a:rPr lang="en-US" sz="1200" dirty="0">
-                <a:solidFill>
-                  <a:srgbClr val="1C2833"/>
-                </a:solidFill>
-                <a:latin typeface="Arial" pitchFamily="34" charset="0"/>
-                <a:ea typeface="Arial" pitchFamily="34" charset="-122"/>
-                <a:cs typeface="Arial" pitchFamily="34" charset="-120"/>
-              </a:rPr>
-              <a:t>"Our city needs a new defence strategy" (Dhanurveda + Arthaśāstra)</a:t>
-            </a:r>
-            <a:endParaRPr lang="en-US" sz="1200" dirty="0"/>
-          </a:p>
-          <a:p>
-            <a:pPr algn="l" marL="342900" indent="-342900">
-              <a:lnSpc>
-                <a:spcPts val="1620"/>
-              </a:lnSpc>
-              <a:spcAft>
-                <a:spcPts val="300"/>
-              </a:spcAft>
-              <a:buSzPct val="100000"/>
-              <a:buChar char="•"/>
-            </a:pPr>
-            <a:r>
-              <a:rPr lang="en-US" sz="1200" dirty="0">
-                <a:solidFill>
-                  <a:srgbClr val="1C2833"/>
-                </a:solidFill>
-                <a:latin typeface="Arial" pitchFamily="34" charset="0"/>
-                <a:ea typeface="Arial" pitchFamily="34" charset="-122"/>
-                <a:cs typeface="Arial" pitchFamily="34" charset="-120"/>
-              </a:rPr>
-              <a:t>"How should taxes be calculated for the rainy season?" (Arthaśāstra)</a:t>
-            </a:r>
-            <a:endParaRPr lang="en-US" sz="1200" dirty="0"/>
-          </a:p>
-          <a:p>
-            <a:pPr algn="l" marL="342900" indent="-342900">
-              <a:lnSpc>
-                <a:spcPts val="1620"/>
-              </a:lnSpc>
-              <a:spcAft>
-                <a:spcPts val="300"/>
-              </a:spcAft>
-              <a:buSzPct val="100000"/>
-              <a:buChar char="•"/>
-            </a:pPr>
-            <a:r>
-              <a:rPr lang="en-US" sz="1200" dirty="0">
-                <a:solidFill>
-                  <a:srgbClr val="1C2833"/>
-                </a:solidFill>
-                <a:latin typeface="Arial" pitchFamily="34" charset="0"/>
-                <a:ea typeface="Arial" pitchFamily="34" charset="-122"/>
-                <a:cs typeface="Arial" pitchFamily="34" charset="-120"/>
-              </a:rPr>
-              <a:t>"I want to learn a new rāga on the vīṇā" (Gandharvaveda)</a:t>
-            </a:r>
-            <a:endParaRPr lang="en-US" sz="1200" dirty="0"/>
-          </a:p>
-          <a:p>
-            <a:pPr algn="l" marL="342900" indent="-342900">
-              <a:lnSpc>
-                <a:spcPts val="1620"/>
-              </a:lnSpc>
-              <a:spcAft>
-                <a:spcPts val="300"/>
-              </a:spcAft>
-              <a:buSzPct val="100000"/>
-              <a:buChar char="•"/>
-            </a:pPr>
-            <a:r>
-              <a:rPr lang="en-US" sz="1200" dirty="0">
-                <a:solidFill>
-                  <a:srgbClr val="1C2833"/>
-                </a:solidFill>
-                <a:latin typeface="Arial" pitchFamily="34" charset="0"/>
-                <a:ea typeface="Arial" pitchFamily="34" charset="-122"/>
-                <a:cs typeface="Arial" pitchFamily="34" charset="-120"/>
-              </a:rPr>
-              <a:t>"Our king wants to build a court of judges" (Arthaśāstra)</a:t>
-            </a:r>
-            <a:endParaRPr lang="en-US" sz="1200" dirty="0"/>
-          </a:p>
-        </p:txBody>
-      </p:sp>
-      <p:sp>
-        <p:nvSpPr>
-          <p:cNvPr id="6" name="Text 4"/>
-          <p:cNvSpPr/>
-          <p:nvPr/>
-        </p:nvSpPr>
-        <p:spPr>
-          <a:xfrm>
-            <a:off x="406301" y="2518916"/>
-            <a:ext cx="8498026" cy="213271"/>
-          </a:xfrm>
-          <a:prstGeom prst="rect">
-            <a:avLst/>
-          </a:prstGeom>
-          <a:noFill/>
-          <a:ln/>
-        </p:spPr>
-        <p:txBody>
-          <a:bodyPr wrap="square" lIns="0" tIns="0" rIns="0" bIns="0" rtlCol="0" anchor="t"/>
-          <a:lstStyle/>
-          <a:p>
-            <a:pPr algn="l" indent="0" marL="0">
-              <a:lnSpc>
-                <a:spcPts val="1680"/>
-              </a:lnSpc>
-              <a:spcBef>
-                <a:spcPts val="300"/>
-              </a:spcBef>
-              <a:spcAft>
-                <a:spcPts val="300"/>
-              </a:spcAft>
-              <a:buNone/>
-            </a:pPr>
-            <a:r>
-              <a:rPr lang="en-US" sz="1200" dirty="0">
-                <a:solidFill>
-                  <a:srgbClr val="1C2833"/>
-                </a:solidFill>
-                <a:latin typeface="Arial" pitchFamily="34" charset="0"/>
-                <a:ea typeface="Arial" pitchFamily="34" charset="-122"/>
-                <a:cs typeface="Arial" pitchFamily="34" charset="-120"/>
-              </a:rPr>
-              <a:t>Discuss: where would Suśruta have fit? (Āyurveda — surgery is a subdomain of medicine in this scheme.)</a:t>
-            </a:r>
-            <a:endParaRPr lang="en-US" sz="1200" dirty="0"/>
-          </a:p>
-        </p:txBody>
-      </p:sp>
-      <p:sp>
-        <p:nvSpPr>
-          <p:cNvPr id="7" name="Text 5"/>
           <p:cNvSpPr/>
           <p:nvPr/>
         </p:nvSpPr>
@@ -4380,7 +7244,7 @@
                 <a:ea typeface="Georgia" pitchFamily="34" charset="-122"/>
                 <a:cs typeface="Georgia" pitchFamily="34" charset="-120"/>
               </a:rPr>
-              <a:t>Wrap-up (5 min)</a:t>
+              <a:t>Core (20 min)</a:t>
             </a:r>
             <a:endParaRPr lang="en-US" sz="1800" dirty="0"/>
           </a:p>
@@ -4394,8 +7258,8 @@
         </p:nvSpPr>
         <p:spPr>
           <a:xfrm>
-            <a:off x="406301" y="870942"/>
-            <a:ext cx="8498026" cy="213271"/>
+            <a:off x="634901" y="883593"/>
+            <a:ext cx="8102798" cy="281880"/>
           </a:xfrm>
           <a:prstGeom prst="rect">
             <a:avLst/>
@@ -4407,6 +7271,52 @@
           <a:bodyPr wrap="square" lIns="0" tIns="0" rIns="0" bIns="0" rtlCol="0" anchor="t"/>
           <a:lstStyle/>
           <a:p>
+            <a:pPr algn="l" marL="342900" indent="-342900">
+              <a:lnSpc>
+                <a:spcPts val="1620"/>
+              </a:lnSpc>
+              <a:spcAft>
+                <a:spcPts val="300"/>
+              </a:spcAft>
+              <a:buSzPct val="100000"/>
+              <a:buChar char="•"/>
+            </a:pPr>
+            <a:r>
+              <a:rPr lang="en-US" sz="1200" b="1" dirty="0">
+                <a:solidFill>
+                  <a:srgbClr val="1C2833"/>
+                </a:solidFill>
+                <a:latin typeface="Arial" pitchFamily="34" charset="0"/>
+                <a:ea typeface="Arial" pitchFamily="34" charset="-122"/>
+                <a:cs typeface="Arial" pitchFamily="34" charset="-120"/>
+              </a:rPr>
+              <a:t>The Four Upavedas — the APPLIED sciences:</a:t>
+            </a:r>
+            <a:endParaRPr lang="en-US" sz="1200" dirty="0"/>
+          </a:p>
+        </p:txBody>
+      </p:sp>
+      <p:sp>
+        <p:nvSpPr>
+          <p:cNvPr id="5" name="Text 3"/>
+          <p:cNvSpPr/>
+          <p:nvPr/>
+        </p:nvSpPr>
+        <p:spPr>
+          <a:xfrm>
+            <a:off x="406301" y="1254323"/>
+            <a:ext cx="8498026" cy="213271"/>
+          </a:xfrm>
+          <a:prstGeom prst="rect">
+            <a:avLst/>
+          </a:prstGeom>
+          <a:noFill/>
+          <a:ln/>
+        </p:spPr>
+        <p:txBody>
+          <a:bodyPr wrap="square" lIns="0" tIns="0" rIns="0" bIns="0" rtlCol="0" anchor="t"/>
+          <a:lstStyle/>
+          <a:p>
             <a:pPr algn="l" indent="0" marL="0">
               <a:lnSpc>
                 <a:spcPts val="1680"/>
@@ -4420,29 +7330,6 @@
               <a:buNone/>
             </a:pPr>
             <a:r>
-              <a:rPr lang="en-US" sz="1200" dirty="0">
-                <a:solidFill>
-                  <a:srgbClr val="1C2833"/>
-                </a:solidFill>
-                <a:latin typeface="Arial" pitchFamily="34" charset="0"/>
-                <a:ea typeface="Arial" pitchFamily="34" charset="-122"/>
-                <a:cs typeface="Arial" pitchFamily="34" charset="-120"/>
-              </a:rPr>
-              <a:t>– Preview Day 5: </a:t>
-            </a:r>
-            <a:pPr algn="l" indent="0" marL="0">
-              <a:lnSpc>
-                <a:spcPts val="1680"/>
-              </a:lnSpc>
-              <a:spcBef>
-                <a:spcPts val="300"/>
-              </a:spcBef>
-              <a:spcAft>
-                <a:spcPts val="300"/>
-              </a:spcAft>
-              <a:buNone/>
-            </a:pPr>
-            <a:r>
               <a:rPr lang="en-US" sz="1200" i="1" dirty="0">
                 <a:solidFill>
                   <a:srgbClr val="1C2833"/>
@@ -4451,7 +7338,7 @@
                 <a:ea typeface="Arial" pitchFamily="34" charset="-122"/>
                 <a:cs typeface="Arial" pitchFamily="34" charset="-120"/>
               </a:rPr>
-              <a:t>"Tomorrow — mid-module quiz on everything we've covered so far."</a:t>
+              <a:t>Each row: # · Sanskrit · Domain · Primary text.</a:t>
             </a:r>
             <a:endParaRPr lang="en-US" sz="1200" dirty="0"/>
           </a:p>
@@ -4459,7 +7346,7 @@
       </p:sp>
       <p:sp>
         <p:nvSpPr>
-          <p:cNvPr id="5" name="Text 3"/>
+          <p:cNvPr id="6" name="Text 4"/>
           <p:cNvSpPr/>
           <p:nvPr/>
         </p:nvSpPr>
@@ -4609,7 +7496,7 @@
                 <a:ea typeface="Georgia" pitchFamily="34" charset="-122"/>
                 <a:cs typeface="Georgia" pitchFamily="34" charset="-120"/>
               </a:rPr>
-              <a:t>Student-facing content</a:t>
+              <a:t>Core (20 min) (cont.)</a:t>
             </a:r>
             <a:endParaRPr lang="en-US" sz="1800" dirty="0"/>
           </a:p>
@@ -4623,61 +7510,8 @@
         </p:nvSpPr>
         <p:spPr>
           <a:xfrm>
-            <a:off x="406301" y="883593"/>
-            <a:ext cx="8331398" cy="1612106"/>
-          </a:xfrm>
-          <a:prstGeom prst="rect">
-            <a:avLst/>
-          </a:prstGeom>
-          <a:solidFill>
-            <a:srgbClr val="F4F8F9"/>
-          </a:solidFill>
-          <a:ln/>
-        </p:spPr>
-        <p:txBody>
-          <a:bodyPr wrap="square" rtlCol="0" anchor="ctr"/>
-          <a:lstStyle/>
-          <a:p>
-            <a:pPr indent="0" marL="0">
-              <a:buNone/>
-            </a:pPr>
-            <a:endParaRPr lang="en-US" dirty="0"/>
-          </a:p>
-        </p:txBody>
-      </p:sp>
-      <p:sp>
-        <p:nvSpPr>
-          <p:cNvPr id="5" name="Shape 3"/>
-          <p:cNvSpPr/>
-          <p:nvPr/>
-        </p:nvSpPr>
-        <p:spPr>
-          <a:xfrm>
-            <a:off x="434876" y="883593"/>
-            <a:ext cx="0" cy="1612106"/>
-          </a:xfrm>
-          <a:prstGeom prst="line">
-            <a:avLst/>
-          </a:prstGeom>
-          <a:noFill/>
-          <a:ln w="57150">
-            <a:solidFill>
-              <a:srgbClr val="FE4447"/>
-            </a:solidFill>
-            <a:prstDash val="solid"/>
-          </a:ln>
-        </p:spPr>
-      </p:sp>
-      <p:sp>
-        <p:nvSpPr>
-          <p:cNvPr id="6" name="Text 4"/>
-          <p:cNvSpPr/>
-          <p:nvPr/>
-        </p:nvSpPr>
-        <p:spPr>
-          <a:xfrm>
-            <a:off x="692051" y="1074093"/>
-            <a:ext cx="7973389" cy="230981"/>
+            <a:off x="634901" y="883593"/>
+            <a:ext cx="8102798" cy="1013222"/>
           </a:xfrm>
           <a:prstGeom prst="rect">
             <a:avLst/>
@@ -4689,178 +7523,426 @@
           <a:bodyPr wrap="square" lIns="0" tIns="0" rIns="0" bIns="0" rtlCol="0" anchor="t"/>
           <a:lstStyle/>
           <a:p>
-            <a:pPr algn="l" indent="0" marL="0">
-              <a:lnSpc>
-                <a:spcPts val="1820"/>
-              </a:lnSpc>
-              <a:spcBef>
-                <a:spcPts val="300"/>
-              </a:spcBef>
-              <a:spcAft>
-                <a:spcPts val="300"/>
-              </a:spcAft>
-              <a:buNone/>
-            </a:pPr>
-            <a:r>
-              <a:rPr lang="en-US" sz="1300" b="1" i="1" dirty="0">
-                <a:solidFill>
-                  <a:srgbClr val="1C2833"/>
-                </a:solidFill>
-                <a:latin typeface="Georgia" pitchFamily="34" charset="0"/>
-                <a:ea typeface="Georgia" pitchFamily="34" charset="-122"/>
-                <a:cs typeface="Georgia" pitchFamily="34" charset="-120"/>
-              </a:rPr>
-              <a:t>The Four Upavedas — the APPLIED sciences</a:t>
-            </a:r>
-            <a:endParaRPr lang="en-US" sz="1300" dirty="0"/>
-          </a:p>
-        </p:txBody>
-      </p:sp>
-      <p:sp>
-        <p:nvSpPr>
-          <p:cNvPr id="7" name="Text 5"/>
-          <p:cNvSpPr/>
-          <p:nvPr/>
-        </p:nvSpPr>
-        <p:spPr>
-          <a:xfrm>
-            <a:off x="692051" y="1343174"/>
-            <a:ext cx="7973389" cy="461963"/>
-          </a:xfrm>
-          <a:prstGeom prst="rect">
-            <a:avLst/>
-          </a:prstGeom>
-          <a:noFill/>
-          <a:ln/>
-        </p:spPr>
-        <p:txBody>
-          <a:bodyPr wrap="square" lIns="0" tIns="0" rIns="0" bIns="0" rtlCol="0" anchor="t"/>
-          <a:lstStyle/>
-          <a:p>
-            <a:pPr algn="l" indent="0" marL="0">
-              <a:lnSpc>
-                <a:spcPts val="1820"/>
-              </a:lnSpc>
-              <a:spcBef>
-                <a:spcPts val="300"/>
-              </a:spcBef>
-              <a:spcAft>
-                <a:spcPts val="300"/>
-              </a:spcAft>
-              <a:buNone/>
-            </a:pPr>
-            <a:r>
-              <a:rPr lang="en-US" sz="1300" i="1" dirty="0">
-                <a:solidFill>
-                  <a:srgbClr val="1C2833"/>
-                </a:solidFill>
-                <a:latin typeface="Georgia" pitchFamily="34" charset="0"/>
-                <a:ea typeface="Georgia" pitchFamily="34" charset="-122"/>
-                <a:cs typeface="Georgia" pitchFamily="34" charset="-120"/>
-              </a:rPr>
-              <a:t>| # | Sanskrit | Domain | |---|----------|--------| | 1 | Āyurveda | Medicine | | 2 | Dhanurveda | Martial arts | | 3 | Gandharvaveda | Music | | 4 | Arthaśāstra | Governance &amp; economics |</a:t>
-            </a:r>
-            <a:endParaRPr lang="en-US" sz="1300" dirty="0"/>
-          </a:p>
-        </p:txBody>
-      </p:sp>
-      <p:sp>
-        <p:nvSpPr>
-          <p:cNvPr id="8" name="Text 6"/>
-          <p:cNvSpPr/>
-          <p:nvPr/>
-        </p:nvSpPr>
-        <p:spPr>
-          <a:xfrm>
-            <a:off x="692051" y="1843236"/>
-            <a:ext cx="7973389" cy="461963"/>
-          </a:xfrm>
-          <a:prstGeom prst="rect">
-            <a:avLst/>
-          </a:prstGeom>
-          <a:noFill/>
-          <a:ln/>
-        </p:spPr>
-        <p:txBody>
-          <a:bodyPr wrap="square" lIns="0" tIns="0" rIns="0" bIns="0" rtlCol="0" anchor="t"/>
-          <a:lstStyle/>
-          <a:p>
-            <a:pPr algn="l" indent="0" marL="0">
-              <a:lnSpc>
-                <a:spcPts val="1820"/>
-              </a:lnSpc>
-              <a:spcBef>
-                <a:spcPts val="300"/>
-              </a:spcBef>
-              <a:spcAft>
-                <a:spcPts val="300"/>
-              </a:spcAft>
-              <a:buNone/>
-            </a:pPr>
-            <a:r>
-              <a:rPr lang="en-US" sz="1300" dirty="0">
-                <a:solidFill>
-                  <a:srgbClr val="1C2833"/>
-                </a:solidFill>
-                <a:latin typeface="Georgia" pitchFamily="34" charset="0"/>
-                <a:ea typeface="Georgia" pitchFamily="34" charset="-122"/>
-                <a:cs typeface="Georgia" pitchFamily="34" charset="-120"/>
-              </a:rPr>
-              <a:t>Standout achievement: </a:t>
-            </a:r>
-            <a:pPr algn="l" indent="0" marL="0">
-              <a:lnSpc>
-                <a:spcPts val="1820"/>
-              </a:lnSpc>
-              <a:spcBef>
-                <a:spcPts val="300"/>
-              </a:spcBef>
-              <a:spcAft>
-                <a:spcPts val="300"/>
-              </a:spcAft>
-              <a:buNone/>
-            </a:pPr>
-            <a:r>
-              <a:rPr lang="en-US" sz="1300" b="1" i="1" dirty="0">
-                <a:solidFill>
-                  <a:srgbClr val="1C2833"/>
-                </a:solidFill>
-                <a:latin typeface="Georgia" pitchFamily="34" charset="0"/>
-                <a:ea typeface="Georgia" pitchFamily="34" charset="-122"/>
-                <a:cs typeface="Georgia" pitchFamily="34" charset="-120"/>
-              </a:rPr>
-              <a:t>Suśruta's surgical procedures</a:t>
-            </a:r>
-            <a:pPr algn="l" indent="0" marL="0">
-              <a:lnSpc>
-                <a:spcPts val="1820"/>
-              </a:lnSpc>
-              <a:spcBef>
-                <a:spcPts val="300"/>
-              </a:spcBef>
-              <a:spcAft>
-                <a:spcPts val="300"/>
-              </a:spcAft>
-              <a:buNone/>
-            </a:pPr>
-            <a:r>
-              <a:rPr lang="en-US" sz="1300" dirty="0">
-                <a:solidFill>
-                  <a:srgbClr val="1C2833"/>
-                </a:solidFill>
-                <a:latin typeface="Georgia" pitchFamily="34" charset="0"/>
-                <a:ea typeface="Georgia" pitchFamily="34" charset="-122"/>
-                <a:cs typeface="Georgia" pitchFamily="34" charset="-120"/>
-              </a:rPr>
-              <a:t> (~6th c. BCE), including cataract surgery and nose reconstruction.</a:t>
-            </a:r>
-            <a:endParaRPr lang="en-US" sz="1300" dirty="0"/>
-          </a:p>
-        </p:txBody>
-      </p:sp>
-      <p:sp>
-        <p:nvSpPr>
-          <p:cNvPr id="9" name="Text 7"/>
+            <a:pPr algn="l" marL="342900" indent="-342900">
+              <a:lnSpc>
+                <a:spcPts val="1620"/>
+              </a:lnSpc>
+              <a:spcAft>
+                <a:spcPts val="300"/>
+              </a:spcAft>
+              <a:buSzPct val="100000"/>
+              <a:buChar char="•"/>
+            </a:pPr>
+            <a:r>
+              <a:rPr lang="en-US" sz="1200" b="1" dirty="0">
+                <a:solidFill>
+                  <a:srgbClr val="1C2833"/>
+                </a:solidFill>
+                <a:latin typeface="Arial" pitchFamily="34" charset="0"/>
+                <a:ea typeface="Arial" pitchFamily="34" charset="-122"/>
+                <a:cs typeface="Arial" pitchFamily="34" charset="-120"/>
+              </a:rPr>
+              <a:t>1</a:t>
+            </a:r>
+            <a:pPr algn="l" indent="0" marL="0">
+              <a:lnSpc>
+                <a:spcPts val="1620"/>
+              </a:lnSpc>
+              <a:spcAft>
+                <a:spcPts val="300"/>
+              </a:spcAft>
+              <a:buNone/>
+            </a:pPr>
+            <a:r>
+              <a:rPr lang="en-US" sz="1200" dirty="0">
+                <a:solidFill>
+                  <a:srgbClr val="1C2833"/>
+                </a:solidFill>
+                <a:latin typeface="Arial" pitchFamily="34" charset="0"/>
+                <a:ea typeface="Arial" pitchFamily="34" charset="-122"/>
+                <a:cs typeface="Arial" pitchFamily="34" charset="-120"/>
+              </a:rPr>
+              <a:t> — </a:t>
+            </a:r>
+            <a:pPr algn="l" indent="0" marL="0">
+              <a:lnSpc>
+                <a:spcPts val="1620"/>
+              </a:lnSpc>
+              <a:spcAft>
+                <a:spcPts val="300"/>
+              </a:spcAft>
+              <a:buNone/>
+            </a:pPr>
+            <a:r>
+              <a:rPr lang="en-US" sz="1200" i="1" dirty="0">
+                <a:solidFill>
+                  <a:srgbClr val="1C2833"/>
+                </a:solidFill>
+                <a:latin typeface="Arial" pitchFamily="34" charset="0"/>
+                <a:ea typeface="Arial" pitchFamily="34" charset="-122"/>
+                <a:cs typeface="Arial" pitchFamily="34" charset="-120"/>
+              </a:rPr>
+              <a:t>Āyurveda</a:t>
+            </a:r>
+            <a:pPr algn="l" indent="0" marL="0">
+              <a:lnSpc>
+                <a:spcPts val="1620"/>
+              </a:lnSpc>
+              <a:spcAft>
+                <a:spcPts val="300"/>
+              </a:spcAft>
+              <a:buNone/>
+            </a:pPr>
+            <a:r>
+              <a:rPr lang="en-US" sz="1200" dirty="0">
+                <a:solidFill>
+                  <a:srgbClr val="1C2833"/>
+                </a:solidFill>
+                <a:latin typeface="Arial" pitchFamily="34" charset="0"/>
+                <a:ea typeface="Arial" pitchFamily="34" charset="-122"/>
+                <a:cs typeface="Arial" pitchFamily="34" charset="-120"/>
+              </a:rPr>
+              <a:t> · Medicine · Caraka Saṃhitā (~2nd c. BCE), Suśruta Saṃhitā</a:t>
+            </a:r>
+            <a:endParaRPr lang="en-US" sz="1200" dirty="0"/>
+          </a:p>
+          <a:p>
+            <a:pPr algn="l" marL="342900" indent="-342900">
+              <a:lnSpc>
+                <a:spcPts val="1620"/>
+              </a:lnSpc>
+              <a:spcAft>
+                <a:spcPts val="300"/>
+              </a:spcAft>
+              <a:buSzPct val="100000"/>
+              <a:buChar char="•"/>
+            </a:pPr>
+            <a:r>
+              <a:rPr lang="en-US" sz="1200" b="1" dirty="0">
+                <a:solidFill>
+                  <a:srgbClr val="1C2833"/>
+                </a:solidFill>
+                <a:latin typeface="Arial" pitchFamily="34" charset="0"/>
+                <a:ea typeface="Arial" pitchFamily="34" charset="-122"/>
+                <a:cs typeface="Arial" pitchFamily="34" charset="-120"/>
+              </a:rPr>
+              <a:t>2</a:t>
+            </a:r>
+            <a:pPr algn="l" indent="0" marL="0">
+              <a:lnSpc>
+                <a:spcPts val="1620"/>
+              </a:lnSpc>
+              <a:spcAft>
+                <a:spcPts val="300"/>
+              </a:spcAft>
+              <a:buNone/>
+            </a:pPr>
+            <a:r>
+              <a:rPr lang="en-US" sz="1200" dirty="0">
+                <a:solidFill>
+                  <a:srgbClr val="1C2833"/>
+                </a:solidFill>
+                <a:latin typeface="Arial" pitchFamily="34" charset="0"/>
+                <a:ea typeface="Arial" pitchFamily="34" charset="-122"/>
+                <a:cs typeface="Arial" pitchFamily="34" charset="-120"/>
+              </a:rPr>
+              <a:t> — </a:t>
+            </a:r>
+            <a:pPr algn="l" indent="0" marL="0">
+              <a:lnSpc>
+                <a:spcPts val="1620"/>
+              </a:lnSpc>
+              <a:spcAft>
+                <a:spcPts val="300"/>
+              </a:spcAft>
+              <a:buNone/>
+            </a:pPr>
+            <a:r>
+              <a:rPr lang="en-US" sz="1200" i="1" dirty="0">
+                <a:solidFill>
+                  <a:srgbClr val="1C2833"/>
+                </a:solidFill>
+                <a:latin typeface="Arial" pitchFamily="34" charset="0"/>
+                <a:ea typeface="Arial" pitchFamily="34" charset="-122"/>
+                <a:cs typeface="Arial" pitchFamily="34" charset="-120"/>
+              </a:rPr>
+              <a:t>Dhanurveda</a:t>
+            </a:r>
+            <a:pPr algn="l" indent="0" marL="0">
+              <a:lnSpc>
+                <a:spcPts val="1620"/>
+              </a:lnSpc>
+              <a:spcAft>
+                <a:spcPts val="300"/>
+              </a:spcAft>
+              <a:buNone/>
+            </a:pPr>
+            <a:r>
+              <a:rPr lang="en-US" sz="1200" dirty="0">
+                <a:solidFill>
+                  <a:srgbClr val="1C2833"/>
+                </a:solidFill>
+                <a:latin typeface="Arial" pitchFamily="34" charset="0"/>
+                <a:ea typeface="Arial" pitchFamily="34" charset="-122"/>
+                <a:cs typeface="Arial" pitchFamily="34" charset="-120"/>
+              </a:rPr>
+              <a:t> · Martial arts &amp; warfare · Various manuals; partial extant</a:t>
+            </a:r>
+            <a:endParaRPr lang="en-US" sz="1200" dirty="0"/>
+          </a:p>
+          <a:p>
+            <a:pPr algn="l" marL="342900" indent="-342900">
+              <a:lnSpc>
+                <a:spcPts val="1620"/>
+              </a:lnSpc>
+              <a:spcAft>
+                <a:spcPts val="300"/>
+              </a:spcAft>
+              <a:buSzPct val="100000"/>
+              <a:buChar char="•"/>
+            </a:pPr>
+            <a:r>
+              <a:rPr lang="en-US" sz="1200" b="1" dirty="0">
+                <a:solidFill>
+                  <a:srgbClr val="1C2833"/>
+                </a:solidFill>
+                <a:latin typeface="Arial" pitchFamily="34" charset="0"/>
+                <a:ea typeface="Arial" pitchFamily="34" charset="-122"/>
+                <a:cs typeface="Arial" pitchFamily="34" charset="-120"/>
+              </a:rPr>
+              <a:t>3</a:t>
+            </a:r>
+            <a:pPr algn="l" indent="0" marL="0">
+              <a:lnSpc>
+                <a:spcPts val="1620"/>
+              </a:lnSpc>
+              <a:spcAft>
+                <a:spcPts val="300"/>
+              </a:spcAft>
+              <a:buNone/>
+            </a:pPr>
+            <a:r>
+              <a:rPr lang="en-US" sz="1200" dirty="0">
+                <a:solidFill>
+                  <a:srgbClr val="1C2833"/>
+                </a:solidFill>
+                <a:latin typeface="Arial" pitchFamily="34" charset="0"/>
+                <a:ea typeface="Arial" pitchFamily="34" charset="-122"/>
+                <a:cs typeface="Arial" pitchFamily="34" charset="-120"/>
+              </a:rPr>
+              <a:t> — </a:t>
+            </a:r>
+            <a:pPr algn="l" indent="0" marL="0">
+              <a:lnSpc>
+                <a:spcPts val="1620"/>
+              </a:lnSpc>
+              <a:spcAft>
+                <a:spcPts val="300"/>
+              </a:spcAft>
+              <a:buNone/>
+            </a:pPr>
+            <a:r>
+              <a:rPr lang="en-US" sz="1200" i="1" dirty="0">
+                <a:solidFill>
+                  <a:srgbClr val="1C2833"/>
+                </a:solidFill>
+                <a:latin typeface="Arial" pitchFamily="34" charset="0"/>
+                <a:ea typeface="Arial" pitchFamily="34" charset="-122"/>
+                <a:cs typeface="Arial" pitchFamily="34" charset="-120"/>
+              </a:rPr>
+              <a:t>Gandharvaveda</a:t>
+            </a:r>
+            <a:pPr algn="l" indent="0" marL="0">
+              <a:lnSpc>
+                <a:spcPts val="1620"/>
+              </a:lnSpc>
+              <a:spcAft>
+                <a:spcPts val="300"/>
+              </a:spcAft>
+              <a:buNone/>
+            </a:pPr>
+            <a:r>
+              <a:rPr lang="en-US" sz="1200" dirty="0">
+                <a:solidFill>
+                  <a:srgbClr val="1C2833"/>
+                </a:solidFill>
+                <a:latin typeface="Arial" pitchFamily="34" charset="0"/>
+                <a:ea typeface="Arial" pitchFamily="34" charset="-122"/>
+                <a:cs typeface="Arial" pitchFamily="34" charset="-120"/>
+              </a:rPr>
+              <a:t> · Music · Bharata's </a:t>
+            </a:r>
+            <a:pPr algn="l" indent="0" marL="0">
+              <a:lnSpc>
+                <a:spcPts val="1620"/>
+              </a:lnSpc>
+              <a:spcAft>
+                <a:spcPts val="300"/>
+              </a:spcAft>
+              <a:buNone/>
+            </a:pPr>
+            <a:r>
+              <a:rPr lang="en-US" sz="1200" i="1" dirty="0">
+                <a:solidFill>
+                  <a:srgbClr val="1C2833"/>
+                </a:solidFill>
+                <a:latin typeface="Arial" pitchFamily="34" charset="0"/>
+                <a:ea typeface="Arial" pitchFamily="34" charset="-122"/>
+                <a:cs typeface="Arial" pitchFamily="34" charset="-120"/>
+              </a:rPr>
+              <a:t>Nāṭyaśāstra</a:t>
+            </a:r>
+            <a:pPr algn="l" indent="0" marL="0">
+              <a:lnSpc>
+                <a:spcPts val="1620"/>
+              </a:lnSpc>
+              <a:spcAft>
+                <a:spcPts val="300"/>
+              </a:spcAft>
+              <a:buNone/>
+            </a:pPr>
+            <a:r>
+              <a:rPr lang="en-US" sz="1200" dirty="0">
+                <a:solidFill>
+                  <a:srgbClr val="1C2833"/>
+                </a:solidFill>
+                <a:latin typeface="Arial" pitchFamily="34" charset="0"/>
+                <a:ea typeface="Arial" pitchFamily="34" charset="-122"/>
+                <a:cs typeface="Arial" pitchFamily="34" charset="-120"/>
+              </a:rPr>
+              <a:t> (~2nd c. BCE)</a:t>
+            </a:r>
+            <a:endParaRPr lang="en-US" sz="1200" dirty="0"/>
+          </a:p>
+          <a:p>
+            <a:pPr algn="l" marL="342900" indent="-342900">
+              <a:lnSpc>
+                <a:spcPts val="1620"/>
+              </a:lnSpc>
+              <a:spcAft>
+                <a:spcPts val="300"/>
+              </a:spcAft>
+              <a:buSzPct val="100000"/>
+              <a:buChar char="•"/>
+            </a:pPr>
+            <a:r>
+              <a:rPr lang="en-US" sz="1200" b="1" dirty="0">
+                <a:solidFill>
+                  <a:srgbClr val="1C2833"/>
+                </a:solidFill>
+                <a:latin typeface="Arial" pitchFamily="34" charset="0"/>
+                <a:ea typeface="Arial" pitchFamily="34" charset="-122"/>
+                <a:cs typeface="Arial" pitchFamily="34" charset="-120"/>
+              </a:rPr>
+              <a:t>4</a:t>
+            </a:r>
+            <a:pPr algn="l" indent="0" marL="0">
+              <a:lnSpc>
+                <a:spcPts val="1620"/>
+              </a:lnSpc>
+              <a:spcAft>
+                <a:spcPts val="300"/>
+              </a:spcAft>
+              <a:buNone/>
+            </a:pPr>
+            <a:r>
+              <a:rPr lang="en-US" sz="1200" dirty="0">
+                <a:solidFill>
+                  <a:srgbClr val="1C2833"/>
+                </a:solidFill>
+                <a:latin typeface="Arial" pitchFamily="34" charset="0"/>
+                <a:ea typeface="Arial" pitchFamily="34" charset="-122"/>
+                <a:cs typeface="Arial" pitchFamily="34" charset="-120"/>
+              </a:rPr>
+              <a:t> — </a:t>
+            </a:r>
+            <a:pPr algn="l" indent="0" marL="0">
+              <a:lnSpc>
+                <a:spcPts val="1620"/>
+              </a:lnSpc>
+              <a:spcAft>
+                <a:spcPts val="300"/>
+              </a:spcAft>
+              <a:buNone/>
+            </a:pPr>
+            <a:r>
+              <a:rPr lang="en-US" sz="1200" i="1" dirty="0">
+                <a:solidFill>
+                  <a:srgbClr val="1C2833"/>
+                </a:solidFill>
+                <a:latin typeface="Arial" pitchFamily="34" charset="0"/>
+                <a:ea typeface="Arial" pitchFamily="34" charset="-122"/>
+                <a:cs typeface="Arial" pitchFamily="34" charset="-120"/>
+              </a:rPr>
+              <a:t>Arthaśāstra</a:t>
+            </a:r>
+            <a:pPr algn="l" indent="0" marL="0">
+              <a:lnSpc>
+                <a:spcPts val="1620"/>
+              </a:lnSpc>
+              <a:spcAft>
+                <a:spcPts val="300"/>
+              </a:spcAft>
+              <a:buNone/>
+            </a:pPr>
+            <a:r>
+              <a:rPr lang="en-US" sz="1200" dirty="0">
+                <a:solidFill>
+                  <a:srgbClr val="1C2833"/>
+                </a:solidFill>
+                <a:latin typeface="Arial" pitchFamily="34" charset="0"/>
+                <a:ea typeface="Arial" pitchFamily="34" charset="-122"/>
+                <a:cs typeface="Arial" pitchFamily="34" charset="-120"/>
+              </a:rPr>
+              <a:t> · Governance &amp; economics · Kauṭilya's </a:t>
+            </a:r>
+            <a:pPr algn="l" indent="0" marL="0">
+              <a:lnSpc>
+                <a:spcPts val="1620"/>
+              </a:lnSpc>
+              <a:spcAft>
+                <a:spcPts val="300"/>
+              </a:spcAft>
+              <a:buNone/>
+            </a:pPr>
+            <a:r>
+              <a:rPr lang="en-US" sz="1200" i="1" dirty="0">
+                <a:solidFill>
+                  <a:srgbClr val="1C2833"/>
+                </a:solidFill>
+                <a:latin typeface="Arial" pitchFamily="34" charset="0"/>
+                <a:ea typeface="Arial" pitchFamily="34" charset="-122"/>
+                <a:cs typeface="Arial" pitchFamily="34" charset="-120"/>
+              </a:rPr>
+              <a:t>Arthaśāstra</a:t>
+            </a:r>
+            <a:pPr algn="l" indent="0" marL="0">
+              <a:lnSpc>
+                <a:spcPts val="1620"/>
+              </a:lnSpc>
+              <a:spcAft>
+                <a:spcPts val="300"/>
+              </a:spcAft>
+              <a:buNone/>
+            </a:pPr>
+            <a:r>
+              <a:rPr lang="en-US" sz="1200" dirty="0">
+                <a:solidFill>
+                  <a:srgbClr val="1C2833"/>
+                </a:solidFill>
+                <a:latin typeface="Arial" pitchFamily="34" charset="0"/>
+                <a:ea typeface="Arial" pitchFamily="34" charset="-122"/>
+                <a:cs typeface="Arial" pitchFamily="34" charset="-120"/>
+              </a:rPr>
+              <a:t> (~3rd c. BCE)</a:t>
+            </a:r>
+            <a:endParaRPr lang="en-US" sz="1200" dirty="0"/>
+          </a:p>
+        </p:txBody>
+      </p:sp>
+      <p:sp>
+        <p:nvSpPr>
+          <p:cNvPr id="5" name="Text 3"/>
           <p:cNvSpPr/>
           <p:nvPr/>
         </p:nvSpPr>
@@ -5010,7 +8092,7 @@
                 <a:ea typeface="Georgia" pitchFamily="34" charset="-122"/>
                 <a:cs typeface="Georgia" pitchFamily="34" charset="-120"/>
               </a:rPr>
-              <a:t>Homework</a:t>
+              <a:t>Core (20 min) (cont.)</a:t>
             </a:r>
             <a:endParaRPr lang="en-US" sz="1800" dirty="0"/>
           </a:p>
@@ -5058,7 +8140,53 @@
                 <a:ea typeface="Arial" pitchFamily="34" charset="-122"/>
                 <a:cs typeface="Arial" pitchFamily="34" charset="-120"/>
               </a:rPr>
-              <a:t>– Look up "Kauṭilya's Arthaśāstra" online. Find ONE specific governance idea it contains (e.g. spy networks, foreign-policy doctrine, tax classifications). Bring tomorrow.</a:t>
+              <a:t>(Note: classifications vary. </a:t>
+            </a:r>
+            <a:pPr algn="l" indent="0" marL="0">
+              <a:lnSpc>
+                <a:spcPts val="1680"/>
+              </a:lnSpc>
+              <a:spcBef>
+                <a:spcPts val="300"/>
+              </a:spcBef>
+              <a:spcAft>
+                <a:spcPts val="300"/>
+              </a:spcAft>
+              <a:buNone/>
+            </a:pPr>
+            <a:r>
+              <a:rPr lang="en-US" sz="1200" i="1" dirty="0">
+                <a:solidFill>
+                  <a:srgbClr val="1C2833"/>
+                </a:solidFill>
+                <a:latin typeface="Arial" pitchFamily="34" charset="0"/>
+                <a:ea typeface="Arial" pitchFamily="34" charset="-122"/>
+                <a:cs typeface="Arial" pitchFamily="34" charset="-120"/>
+              </a:rPr>
+              <a:t>Sthāpatya-veda</a:t>
+            </a:r>
+            <a:pPr algn="l" indent="0" marL="0">
+              <a:lnSpc>
+                <a:spcPts val="1680"/>
+              </a:lnSpc>
+              <a:spcBef>
+                <a:spcPts val="300"/>
+              </a:spcBef>
+              <a:spcAft>
+                <a:spcPts val="300"/>
+              </a:spcAft>
+              <a:buNone/>
+            </a:pPr>
+            <a:r>
+              <a:rPr lang="en-US" sz="1200" dirty="0">
+                <a:solidFill>
+                  <a:srgbClr val="1C2833"/>
+                </a:solidFill>
+                <a:latin typeface="Arial" pitchFamily="34" charset="0"/>
+                <a:ea typeface="Arial" pitchFamily="34" charset="-122"/>
+                <a:cs typeface="Arial" pitchFamily="34" charset="-120"/>
+              </a:rPr>
+              <a:t> — architecture — sometimes counted as a 5th. Stick to the standard 4 for clarity.)</a:t>
             </a:r>
             <a:endParaRPr lang="en-US" sz="1200" dirty="0"/>
           </a:p>
@@ -5067,6 +8195,169 @@
       <p:sp>
         <p:nvSpPr>
           <p:cNvPr id="5" name="Text 3"/>
+          <p:cNvSpPr/>
+          <p:nvPr/>
+        </p:nvSpPr>
+        <p:spPr>
+          <a:xfrm>
+            <a:off x="634901" y="1386334"/>
+            <a:ext cx="8102798" cy="281880"/>
+          </a:xfrm>
+          <a:prstGeom prst="rect">
+            <a:avLst/>
+          </a:prstGeom>
+          <a:noFill/>
+          <a:ln/>
+        </p:spPr>
+        <p:txBody>
+          <a:bodyPr wrap="square" lIns="0" tIns="0" rIns="0" bIns="0" rtlCol="0" anchor="t"/>
+          <a:lstStyle/>
+          <a:p>
+            <a:pPr algn="l" marL="342900" indent="-342900">
+              <a:lnSpc>
+                <a:spcPts val="1620"/>
+              </a:lnSpc>
+              <a:spcAft>
+                <a:spcPts val="300"/>
+              </a:spcAft>
+              <a:buSzPct val="100000"/>
+              <a:buChar char="•"/>
+            </a:pPr>
+            <a:r>
+              <a:rPr lang="en-US" sz="1200" b="1" dirty="0">
+                <a:solidFill>
+                  <a:srgbClr val="1C2833"/>
+                </a:solidFill>
+                <a:latin typeface="Arial" pitchFamily="34" charset="0"/>
+                <a:ea typeface="Arial" pitchFamily="34" charset="-122"/>
+                <a:cs typeface="Arial" pitchFamily="34" charset="-120"/>
+              </a:rPr>
+              <a:t>Tour each briefly:</a:t>
+            </a:r>
+            <a:endParaRPr lang="en-US" sz="1200" dirty="0"/>
+          </a:p>
+        </p:txBody>
+      </p:sp>
+      <p:sp>
+        <p:nvSpPr>
+          <p:cNvPr id="6" name="Text 4"/>
+          <p:cNvSpPr/>
+          <p:nvPr/>
+        </p:nvSpPr>
+        <p:spPr>
+          <a:xfrm>
+            <a:off x="406301" y="1757065"/>
+            <a:ext cx="8498026" cy="426541"/>
+          </a:xfrm>
+          <a:prstGeom prst="rect">
+            <a:avLst/>
+          </a:prstGeom>
+          <a:noFill/>
+          <a:ln/>
+        </p:spPr>
+        <p:txBody>
+          <a:bodyPr wrap="square" lIns="0" tIns="0" rIns="0" bIns="0" rtlCol="0" anchor="t"/>
+          <a:lstStyle/>
+          <a:p>
+            <a:pPr algn="l" indent="0" marL="0">
+              <a:lnSpc>
+                <a:spcPts val="1680"/>
+              </a:lnSpc>
+              <a:spcBef>
+                <a:spcPts val="300"/>
+              </a:spcBef>
+              <a:spcAft>
+                <a:spcPts val="300"/>
+              </a:spcAft>
+              <a:buNone/>
+            </a:pPr>
+            <a:r>
+              <a:rPr lang="en-US" sz="1200" b="1" dirty="0">
+                <a:solidFill>
+                  <a:srgbClr val="1C2833"/>
+                </a:solidFill>
+                <a:latin typeface="Arial" pitchFamily="34" charset="0"/>
+                <a:ea typeface="Arial" pitchFamily="34" charset="-122"/>
+                <a:cs typeface="Arial" pitchFamily="34" charset="-120"/>
+              </a:rPr>
+              <a:t>Āyurveda</a:t>
+            </a:r>
+            <a:pPr algn="l" indent="0" marL="0">
+              <a:lnSpc>
+                <a:spcPts val="1680"/>
+              </a:lnSpc>
+              <a:spcBef>
+                <a:spcPts val="300"/>
+              </a:spcBef>
+              <a:spcAft>
+                <a:spcPts val="300"/>
+              </a:spcAft>
+              <a:buNone/>
+            </a:pPr>
+            <a:r>
+              <a:rPr lang="en-US" sz="1200" dirty="0">
+                <a:solidFill>
+                  <a:srgbClr val="1C2833"/>
+                </a:solidFill>
+                <a:latin typeface="Arial" pitchFamily="34" charset="0"/>
+                <a:ea typeface="Arial" pitchFamily="34" charset="-122"/>
+                <a:cs typeface="Arial" pitchFamily="34" charset="-120"/>
+              </a:rPr>
+              <a:t> — </a:t>
+            </a:r>
+            <a:pPr algn="l" indent="0" marL="0">
+              <a:lnSpc>
+                <a:spcPts val="1680"/>
+              </a:lnSpc>
+              <a:spcBef>
+                <a:spcPts val="300"/>
+              </a:spcBef>
+              <a:spcAft>
+                <a:spcPts val="300"/>
+              </a:spcAft>
+              <a:buNone/>
+            </a:pPr>
+            <a:r>
+              <a:rPr lang="en-US" sz="1200" i="1" dirty="0">
+                <a:solidFill>
+                  <a:srgbClr val="1C2833"/>
+                </a:solidFill>
+                <a:latin typeface="Arial" pitchFamily="34" charset="0"/>
+                <a:ea typeface="Arial" pitchFamily="34" charset="-122"/>
+                <a:cs typeface="Arial" pitchFamily="34" charset="-120"/>
+              </a:rPr>
+              <a:t>Caraka Saṃhitā</a:t>
+            </a:r>
+            <a:pPr algn="l" indent="0" marL="0">
+              <a:lnSpc>
+                <a:spcPts val="1680"/>
+              </a:lnSpc>
+              <a:spcBef>
+                <a:spcPts val="300"/>
+              </a:spcBef>
+              <a:spcAft>
+                <a:spcPts val="300"/>
+              </a:spcAft>
+              <a:buNone/>
+            </a:pPr>
+            <a:r>
+              <a:rPr lang="en-US" sz="1200" dirty="0">
+                <a:solidFill>
+                  <a:srgbClr val="1C2833"/>
+                </a:solidFill>
+                <a:latin typeface="Arial" pitchFamily="34" charset="0"/>
+                <a:ea typeface="Arial" pitchFamily="34" charset="-122"/>
+                <a:cs typeface="Arial" pitchFamily="34" charset="-120"/>
+              </a:rPr>
+              <a:t> lays out a full theory of health, the three doshas (vāta, pitta, kapha), diagnostic methods, and pharmacology. Module 3 covers this in depth.</a:t>
+            </a:r>
+            <a:endParaRPr lang="en-US" sz="1200" dirty="0"/>
+          </a:p>
+        </p:txBody>
+      </p:sp>
+      <p:sp>
+        <p:nvSpPr>
+          <p:cNvPr id="7" name="Text 5"/>
           <p:cNvSpPr/>
           <p:nvPr/>
         </p:nvSpPr>
